--- a/output/wordlabs-be-prefix-3day.pptx
+++ b/output/wordlabs-be-prefix-3day.pptx
@@ -4240,7 +4240,7 @@
                 <a:ea typeface="Calibri" pitchFamily="34" charset="-122"/>
                 <a:cs typeface="Calibri" pitchFamily="34" charset="-120"/>
               </a:rPr>
-              <a:t>"make, cause, around, thoroughly"</a:t>
+              <a:t>"make, cause, or thoroughly"</a:t>
             </a:r>
             <a:endParaRPr lang="en-US" sz="2200" dirty="0"/>
           </a:p>
@@ -5288,7 +5288,7 @@
                 <a:ea typeface="Calibri" pitchFamily="34" charset="-122"/>
                 <a:cs typeface="Calibri" pitchFamily="34" charset="-120"/>
               </a:rPr>
-              <a:t>Word Labs  •  wordlabs.app  •  Prefix: 'be-' = make, cause, around, thoroughly</a:t>
+              <a:t>Word Labs  •  wordlabs.app  •  Prefix: 'be-' = make, cause, or thoroughly</a:t>
             </a:r>
             <a:endParaRPr lang="en-US" sz="800" dirty="0"/>
           </a:p>
@@ -5928,7 +5928,7 @@
                 <a:ea typeface="Calibri" pitchFamily="34" charset="-122"/>
                 <a:cs typeface="Calibri" pitchFamily="34" charset="-120"/>
               </a:rPr>
-              <a:t>Word Labs  •  wordlabs.app  •  Prefix: 'be-' = make, cause, around, thoroughly</a:t>
+              <a:t>Word Labs  •  wordlabs.app  •  Prefix: 'be-' = make, cause, or thoroughly</a:t>
             </a:r>
             <a:endParaRPr lang="en-US" sz="800" dirty="0"/>
           </a:p>
@@ -6040,7 +6040,7 @@
                 <a:ea typeface="Calibri" pitchFamily="34" charset="-122"/>
                 <a:cs typeface="Calibri" pitchFamily="34" charset="-120"/>
               </a:rPr>
-              <a:t>She tried to </a:t>
+              <a:t>Jake tried to </a:t>
             </a:r>
             <a:pPr algn="l" indent="0" marL="0">
               <a:buNone/>
@@ -6071,7 +6071,7 @@
                 <a:ea typeface="Calibri" pitchFamily="34" charset="-122"/>
                 <a:cs typeface="Calibri" pitchFamily="34" charset="-120"/>
               </a:rPr>
-              <a:t> the shy girl who sat </a:t>
+              <a:t> the shy puppy at the shelter, and it soon </a:t>
             </a:r>
             <a:pPr algn="l" indent="0" marL="0">
               <a:buNone/>
@@ -6088,7 +6088,7 @@
                 <a:ea typeface="Calibri" pitchFamily="34" charset="-122"/>
                 <a:cs typeface="Calibri" pitchFamily="34" charset="-120"/>
               </a:rPr>
-              <a:t>beneath</a:t>
+              <a:t>began</a:t>
             </a:r>
             <a:pPr algn="l" indent="0" marL="0">
               <a:buNone/>
@@ -6102,7 +6102,7 @@
                 <a:ea typeface="Calibri" pitchFamily="34" charset="-122"/>
                 <a:cs typeface="Calibri" pitchFamily="34" charset="-120"/>
               </a:rPr>
-              <a:t> the old tree.</a:t>
+              <a:t> to wag its tail.</a:t>
             </a:r>
             <a:endParaRPr lang="en-US" sz="1800" dirty="0"/>
           </a:p>
@@ -6385,7 +6385,7 @@
                 <a:ea typeface="Trebuchet MS" pitchFamily="34" charset="-122"/>
                 <a:cs typeface="Trebuchet MS" pitchFamily="34" charset="-120"/>
               </a:rPr>
-              <a:t>beneath</a:t>
+              <a:t>began</a:t>
             </a:r>
             <a:endParaRPr lang="en-US" sz="1400" dirty="0"/>
           </a:p>
@@ -6716,7 +6716,7 @@
                 <a:ea typeface="Calibri" pitchFamily="34" charset="-122"/>
                 <a:cs typeface="Calibri" pitchFamily="34" charset="-120"/>
               </a:rPr>
-              <a:t>Word Labs  •  wordlabs.app  •  Prefix: 'be-' = make, cause, around, thoroughly</a:t>
+              <a:t>Word Labs  •  wordlabs.app  •  Prefix: 'be-' = make, cause, or thoroughly</a:t>
             </a:r>
             <a:endParaRPr lang="en-US" sz="800" dirty="0"/>
           </a:p>
@@ -7543,7 +7543,7 @@
                 <a:ea typeface="Calibri" pitchFamily="34" charset="-122"/>
                 <a:cs typeface="Calibri" pitchFamily="34" charset="-120"/>
               </a:rPr>
-              <a:t>Word Labs  •  wordlabs.app  •  Prefix: 'be-' = make, cause, around, thoroughly</a:t>
+              <a:t>Word Labs  •  wordlabs.app  •  Prefix: 'be-' = make, cause, or thoroughly</a:t>
             </a:r>
             <a:endParaRPr lang="en-US" sz="800" dirty="0"/>
           </a:p>
@@ -7860,7 +7860,7 @@
                 <a:ea typeface="Calibri" pitchFamily="34" charset="-122"/>
                 <a:cs typeface="Calibri" pitchFamily="34" charset="-120"/>
               </a:rPr>
-              <a:t>make, cause</a:t>
+              <a:t>make or cause</a:t>
             </a:r>
             <a:endParaRPr lang="en-US" sz="850" dirty="0"/>
           </a:p>
@@ -8528,7 +8528,7 @@
                 <a:ea typeface="Calibri" pitchFamily="34" charset="-122"/>
                 <a:cs typeface="Calibri" pitchFamily="34" charset="-120"/>
               </a:rPr>
-              <a:t>Word Labs  •  wordlabs.app  •  Prefix: 'be-' = make, cause, around, thoroughly</a:t>
+              <a:t>Word Labs  •  wordlabs.app  •  Prefix: 'be-' = make, cause, or thoroughly</a:t>
             </a:r>
             <a:endParaRPr lang="en-US" sz="800" dirty="0"/>
           </a:p>
@@ -8845,7 +8845,7 @@
                 <a:ea typeface="Calibri" pitchFamily="34" charset="-122"/>
                 <a:cs typeface="Calibri" pitchFamily="34" charset="-120"/>
               </a:rPr>
-              <a:t>make, cause</a:t>
+              <a:t>make or cause</a:t>
             </a:r>
             <a:endParaRPr lang="en-US" sz="850" dirty="0"/>
           </a:p>
@@ -9645,7 +9645,7 @@
                 <a:ea typeface="Calibri" pitchFamily="34" charset="-122"/>
                 <a:cs typeface="Calibri" pitchFamily="34" charset="-120"/>
               </a:rPr>
-              <a:t>Word Labs  •  wordlabs.app  •  Prefix: 'be-' = make, cause, around, thoroughly</a:t>
+              <a:t>Word Labs  •  wordlabs.app  •  Prefix: 'be-' = make, cause, or thoroughly</a:t>
             </a:r>
             <a:endParaRPr lang="en-US" sz="800" dirty="0"/>
           </a:p>
@@ -9962,7 +9962,7 @@
                 <a:ea typeface="Calibri" pitchFamily="34" charset="-122"/>
                 <a:cs typeface="Calibri" pitchFamily="34" charset="-120"/>
               </a:rPr>
-              <a:t>make, cause</a:t>
+              <a:t>make or cause</a:t>
             </a:r>
             <a:endParaRPr lang="en-US" sz="850" dirty="0"/>
           </a:p>
@@ -10445,7 +10445,7 @@
         </p:nvSpPr>
         <p:spPr>
           <a:xfrm>
-            <a:off x="2427732" y="4169664"/>
+            <a:off x="2124837" y="4169664"/>
             <a:ext cx="685800" cy="384048"/>
           </a:xfrm>
           <a:prstGeom prst="rect">
@@ -10472,7 +10472,7 @@
         </p:nvSpPr>
         <p:spPr>
           <a:xfrm>
-            <a:off x="2427732" y="4169664"/>
+            <a:off x="2124837" y="4169664"/>
             <a:ext cx="685800" cy="384048"/>
           </a:xfrm>
           <a:prstGeom prst="rect">
@@ -10511,7 +10511,7 @@
         </p:nvSpPr>
         <p:spPr>
           <a:xfrm>
-            <a:off x="3639312" y="4169664"/>
+            <a:off x="3033522" y="4169664"/>
             <a:ext cx="685800" cy="384048"/>
           </a:xfrm>
           <a:prstGeom prst="rect">
@@ -10538,7 +10538,7 @@
         </p:nvSpPr>
         <p:spPr>
           <a:xfrm>
-            <a:off x="3639312" y="4169664"/>
+            <a:off x="3033522" y="4169664"/>
             <a:ext cx="685800" cy="384048"/>
           </a:xfrm>
           <a:prstGeom prst="rect">
@@ -10577,7 +10577,7 @@
         </p:nvSpPr>
         <p:spPr>
           <a:xfrm>
-            <a:off x="4850892" y="4169664"/>
+            <a:off x="3942207" y="4169664"/>
             <a:ext cx="685800" cy="384048"/>
           </a:xfrm>
           <a:prstGeom prst="rect">
@@ -10604,7 +10604,7 @@
         </p:nvSpPr>
         <p:spPr>
           <a:xfrm>
-            <a:off x="4850892" y="4169664"/>
+            <a:off x="3942207" y="4169664"/>
             <a:ext cx="685800" cy="384048"/>
           </a:xfrm>
           <a:prstGeom prst="rect">
@@ -10629,7 +10629,7 @@
                 <a:ea typeface="Trebuchet MS" pitchFamily="34" charset="-122"/>
                 <a:cs typeface="Trebuchet MS" pitchFamily="34" charset="-120"/>
               </a:rPr>
-              <a:t>fr</a:t>
+              <a:t>f</a:t>
             </a:r>
             <a:endParaRPr lang="en-US" sz="900" dirty="0"/>
           </a:p>
@@ -10643,7 +10643,7 @@
         </p:nvSpPr>
         <p:spPr>
           <a:xfrm>
-            <a:off x="6062472" y="4169664"/>
+            <a:off x="4850892" y="4169664"/>
             <a:ext cx="685800" cy="384048"/>
           </a:xfrm>
           <a:prstGeom prst="rect">
@@ -10670,7 +10670,7 @@
         </p:nvSpPr>
         <p:spPr>
           <a:xfrm>
-            <a:off x="6062472" y="4169664"/>
+            <a:off x="4850892" y="4169664"/>
             <a:ext cx="685800" cy="384048"/>
           </a:xfrm>
           <a:prstGeom prst="rect">
@@ -10695,6 +10695,72 @@
                 <a:ea typeface="Trebuchet MS" pitchFamily="34" charset="-122"/>
                 <a:cs typeface="Trebuchet MS" pitchFamily="34" charset="-120"/>
               </a:rPr>
+              <a:t>r</a:t>
+            </a:r>
+            <a:endParaRPr lang="en-US" sz="900" dirty="0"/>
+          </a:p>
+        </p:txBody>
+      </p:sp>
+      <p:sp>
+        <p:nvSpPr>
+          <p:cNvPr id="41" name="Shape 39"/>
+          <p:cNvSpPr/>
+          <p:nvPr/>
+        </p:nvSpPr>
+        <p:spPr>
+          <a:xfrm>
+            <a:off x="5759577" y="4169664"/>
+            <a:ext cx="685800" cy="384048"/>
+          </a:xfrm>
+          <a:prstGeom prst="rect">
+            <a:avLst>
+              <a:gd name="adj" fmla="val 9524"/>
+            </a:avLst>
+          </a:prstGeom>
+          <a:solidFill>
+            <a:srgbClr val="FFFFFF"/>
+          </a:solidFill>
+          <a:ln w="12700">
+            <a:solidFill>
+              <a:srgbClr val="DB2777"/>
+            </a:solidFill>
+            <a:prstDash val="solid"/>
+          </a:ln>
+        </p:spPr>
+      </p:sp>
+      <p:sp>
+        <p:nvSpPr>
+          <p:cNvPr id="42" name="Text 40"/>
+          <p:cNvSpPr/>
+          <p:nvPr/>
+        </p:nvSpPr>
+        <p:spPr>
+          <a:xfrm>
+            <a:off x="5759577" y="4169664"/>
+            <a:ext cx="685800" cy="384048"/>
+          </a:xfrm>
+          <a:prstGeom prst="rect">
+            <a:avLst/>
+          </a:prstGeom>
+          <a:noFill/>
+          <a:ln/>
+        </p:spPr>
+        <p:txBody>
+          <a:bodyPr wrap="square" lIns="0" tIns="0" rIns="0" bIns="0" rtlCol="0" anchor="ctr"/>
+          <a:lstStyle/>
+          <a:p>
+            <a:pPr algn="ctr" indent="0" marL="0">
+              <a:buNone/>
+            </a:pPr>
+            <a:r>
+              <a:rPr lang="en-US" sz="900" b="1" dirty="0">
+                <a:solidFill>
+                  <a:srgbClr val="9D174D"/>
+                </a:solidFill>
+                <a:latin typeface="Trebuchet MS" pitchFamily="34" charset="0"/>
+                <a:ea typeface="Trebuchet MS" pitchFamily="34" charset="-122"/>
+                <a:cs typeface="Trebuchet MS" pitchFamily="34" charset="-120"/>
+              </a:rPr>
               <a:t>ie</a:t>
             </a:r>
             <a:endParaRPr lang="en-US" sz="900" dirty="0"/>
@@ -10703,13 +10769,13 @@
       </p:sp>
       <p:sp>
         <p:nvSpPr>
-          <p:cNvPr id="41" name="Text 39"/>
-          <p:cNvSpPr/>
-          <p:nvPr/>
-        </p:nvSpPr>
-        <p:spPr>
-          <a:xfrm>
-            <a:off x="6062472" y="4572000"/>
+          <p:cNvPr id="43" name="Text 41"/>
+          <p:cNvSpPr/>
+          <p:nvPr/>
+        </p:nvSpPr>
+        <p:spPr>
+          <a:xfrm>
+            <a:off x="5759577" y="4572000"/>
             <a:ext cx="685800" cy="219456"/>
           </a:xfrm>
           <a:prstGeom prst="rect">
@@ -10742,13 +10808,13 @@
       </p:sp>
       <p:sp>
         <p:nvSpPr>
-          <p:cNvPr id="42" name="Shape 40"/>
-          <p:cNvSpPr/>
-          <p:nvPr/>
-        </p:nvSpPr>
-        <p:spPr>
-          <a:xfrm>
-            <a:off x="7274052" y="4169664"/>
+          <p:cNvPr id="44" name="Shape 42"/>
+          <p:cNvSpPr/>
+          <p:nvPr/>
+        </p:nvSpPr>
+        <p:spPr>
+          <a:xfrm>
+            <a:off x="6668262" y="4169664"/>
             <a:ext cx="685800" cy="384048"/>
           </a:xfrm>
           <a:prstGeom prst="rect">
@@ -10769,13 +10835,13 @@
       </p:sp>
       <p:sp>
         <p:nvSpPr>
-          <p:cNvPr id="43" name="Text 41"/>
-          <p:cNvSpPr/>
-          <p:nvPr/>
-        </p:nvSpPr>
-        <p:spPr>
-          <a:xfrm>
-            <a:off x="7274052" y="4169664"/>
+          <p:cNvPr id="45" name="Text 43"/>
+          <p:cNvSpPr/>
+          <p:nvPr/>
+        </p:nvSpPr>
+        <p:spPr>
+          <a:xfrm>
+            <a:off x="6668262" y="4169664"/>
             <a:ext cx="685800" cy="384048"/>
           </a:xfrm>
           <a:prstGeom prst="rect">
@@ -10800,7 +10866,73 @@
                 <a:ea typeface="Trebuchet MS" pitchFamily="34" charset="-122"/>
                 <a:cs typeface="Trebuchet MS" pitchFamily="34" charset="-120"/>
               </a:rPr>
-              <a:t>nd</a:t>
+              <a:t>n</a:t>
+            </a:r>
+            <a:endParaRPr lang="en-US" sz="900" dirty="0"/>
+          </a:p>
+        </p:txBody>
+      </p:sp>
+      <p:sp>
+        <p:nvSpPr>
+          <p:cNvPr id="46" name="Shape 44"/>
+          <p:cNvSpPr/>
+          <p:nvPr/>
+        </p:nvSpPr>
+        <p:spPr>
+          <a:xfrm>
+            <a:off x="7576947" y="4169664"/>
+            <a:ext cx="685800" cy="384048"/>
+          </a:xfrm>
+          <a:prstGeom prst="rect">
+            <a:avLst>
+              <a:gd name="adj" fmla="val 9524"/>
+            </a:avLst>
+          </a:prstGeom>
+          <a:solidFill>
+            <a:srgbClr val="FFFFFF"/>
+          </a:solidFill>
+          <a:ln w="12700">
+            <a:solidFill>
+              <a:srgbClr val="DB2777"/>
+            </a:solidFill>
+            <a:prstDash val="solid"/>
+          </a:ln>
+        </p:spPr>
+      </p:sp>
+      <p:sp>
+        <p:nvSpPr>
+          <p:cNvPr id="47" name="Text 45"/>
+          <p:cNvSpPr/>
+          <p:nvPr/>
+        </p:nvSpPr>
+        <p:spPr>
+          <a:xfrm>
+            <a:off x="7576947" y="4169664"/>
+            <a:ext cx="685800" cy="384048"/>
+          </a:xfrm>
+          <a:prstGeom prst="rect">
+            <a:avLst/>
+          </a:prstGeom>
+          <a:noFill/>
+          <a:ln/>
+        </p:spPr>
+        <p:txBody>
+          <a:bodyPr wrap="square" lIns="0" tIns="0" rIns="0" bIns="0" rtlCol="0" anchor="ctr"/>
+          <a:lstStyle/>
+          <a:p>
+            <a:pPr algn="ctr" indent="0" marL="0">
+              <a:buNone/>
+            </a:pPr>
+            <a:r>
+              <a:rPr lang="en-US" sz="900" b="1" dirty="0">
+                <a:solidFill>
+                  <a:srgbClr val="9D174D"/>
+                </a:solidFill>
+                <a:latin typeface="Trebuchet MS" pitchFamily="34" charset="0"/>
+                <a:ea typeface="Trebuchet MS" pitchFamily="34" charset="-122"/>
+                <a:cs typeface="Trebuchet MS" pitchFamily="34" charset="-120"/>
+              </a:rPr>
+              <a:t>d</a:t>
             </a:r>
             <a:endParaRPr lang="en-US" sz="900" dirty="0"/>
           </a:p>
@@ -11092,7 +11224,7 @@
                 <a:ea typeface="Calibri" pitchFamily="34" charset="-122"/>
                 <a:cs typeface="Calibri" pitchFamily="34" charset="-120"/>
               </a:rPr>
-              <a:t>Word Labs  •  wordlabs.app  •  Prefix: 'be-' = make, cause, around, thoroughly</a:t>
+              <a:t>Word Labs  •  wordlabs.app  •  Prefix: 'be-' = make, cause, or thoroughly</a:t>
             </a:r>
             <a:endParaRPr lang="en-US" sz="800" dirty="0"/>
           </a:p>
@@ -11231,7 +11363,7 @@
                 <a:ea typeface="Trebuchet MS" pitchFamily="34" charset="-122"/>
                 <a:cs typeface="Trebuchet MS" pitchFamily="34" charset="-120"/>
               </a:rPr>
-              <a:t>beneath</a:t>
+              <a:t>began</a:t>
             </a:r>
             <a:endParaRPr lang="en-US" sz="2800" dirty="0"/>
           </a:p>
@@ -11919,7 +12051,7 @@
                 <a:ea typeface="Calibri" pitchFamily="34" charset="-122"/>
                 <a:cs typeface="Calibri" pitchFamily="34" charset="-120"/>
               </a:rPr>
-              <a:t>Word Labs  •  wordlabs.app  •  Prefix: 'be-' = make, cause, around, thoroughly</a:t>
+              <a:t>Word Labs  •  wordlabs.app  •  Prefix: 'be-' = make, cause, or thoroughly</a:t>
             </a:r>
             <a:endParaRPr lang="en-US" sz="800" dirty="0"/>
           </a:p>
@@ -12058,7 +12190,7 @@
                 <a:ea typeface="Trebuchet MS" pitchFamily="34" charset="-122"/>
                 <a:cs typeface="Trebuchet MS" pitchFamily="34" charset="-120"/>
               </a:rPr>
-              <a:t>beneath</a:t>
+              <a:t>began</a:t>
             </a:r>
             <a:endParaRPr lang="en-US" sz="2800" dirty="0"/>
           </a:p>
@@ -12236,7 +12368,7 @@
                 <a:ea typeface="Calibri" pitchFamily="34" charset="-122"/>
                 <a:cs typeface="Calibri" pitchFamily="34" charset="-120"/>
               </a:rPr>
-              <a:t>around, below</a:t>
+              <a:t>make or cause</a:t>
             </a:r>
             <a:endParaRPr lang="en-US" sz="850" dirty="0"/>
           </a:p>
@@ -12309,7 +12441,7 @@
                 <a:ea typeface="Trebuchet MS" pitchFamily="34" charset="-122"/>
                 <a:cs typeface="Trebuchet MS" pitchFamily="34" charset="-120"/>
               </a:rPr>
-              <a:t>neath</a:t>
+              <a:t>gan</a:t>
             </a:r>
             <a:endParaRPr lang="en-US" sz="1300" dirty="0"/>
           </a:p>
@@ -12348,7 +12480,7 @@
                 <a:ea typeface="Calibri" pitchFamily="34" charset="-122"/>
                 <a:cs typeface="Calibri" pitchFamily="34" charset="-120"/>
               </a:rPr>
-              <a:t>below, under</a:t>
+              <a:t>old form of 'go' or 'begin'</a:t>
             </a:r>
             <a:endParaRPr lang="en-US" sz="850" dirty="0"/>
           </a:p>
@@ -12904,7 +13036,7 @@
                 <a:ea typeface="Calibri" pitchFamily="34" charset="-122"/>
                 <a:cs typeface="Calibri" pitchFamily="34" charset="-120"/>
               </a:rPr>
-              <a:t>Word Labs  •  wordlabs.app  •  Prefix: 'be-' = make, cause, around, thoroughly</a:t>
+              <a:t>Word Labs  •  wordlabs.app  •  Prefix: 'be-' = make, cause, or thoroughly</a:t>
             </a:r>
             <a:endParaRPr lang="en-US" sz="800" dirty="0"/>
           </a:p>
@@ -13043,7 +13175,7 @@
                 <a:ea typeface="Trebuchet MS" pitchFamily="34" charset="-122"/>
                 <a:cs typeface="Trebuchet MS" pitchFamily="34" charset="-120"/>
               </a:rPr>
-              <a:t>beneath</a:t>
+              <a:t>began</a:t>
             </a:r>
             <a:endParaRPr lang="en-US" sz="2800" dirty="0"/>
           </a:p>
@@ -13221,7 +13353,7 @@
                 <a:ea typeface="Calibri" pitchFamily="34" charset="-122"/>
                 <a:cs typeface="Calibri" pitchFamily="34" charset="-120"/>
               </a:rPr>
-              <a:t>around, below</a:t>
+              <a:t>make or cause</a:t>
             </a:r>
             <a:endParaRPr lang="en-US" sz="850" dirty="0"/>
           </a:p>
@@ -13294,7 +13426,7 @@
                 <a:ea typeface="Trebuchet MS" pitchFamily="34" charset="-122"/>
                 <a:cs typeface="Trebuchet MS" pitchFamily="34" charset="-120"/>
               </a:rPr>
-              <a:t>neath</a:t>
+              <a:t>gan</a:t>
             </a:r>
             <a:endParaRPr lang="en-US" sz="1300" dirty="0"/>
           </a:p>
@@ -13333,7 +13465,7 @@
                 <a:ea typeface="Calibri" pitchFamily="34" charset="-122"/>
                 <a:cs typeface="Calibri" pitchFamily="34" charset="-120"/>
               </a:rPr>
-              <a:t>below, under</a:t>
+              <a:t>old form of 'go' or 'begin'</a:t>
             </a:r>
             <a:endParaRPr lang="en-US" sz="850" dirty="0"/>
           </a:p>
@@ -13597,7 +13729,7 @@
                 <a:ea typeface="Trebuchet MS" pitchFamily="34" charset="-122"/>
                 <a:cs typeface="Trebuchet MS" pitchFamily="34" charset="-120"/>
               </a:rPr>
-              <a:t>neath</a:t>
+              <a:t>gan</a:t>
             </a:r>
             <a:endParaRPr lang="en-US" sz="1400" dirty="0"/>
           </a:p>
@@ -13930,7 +14062,7 @@
                 <a:ea typeface="Calibri" pitchFamily="34" charset="-122"/>
                 <a:cs typeface="Calibri" pitchFamily="34" charset="-120"/>
               </a:rPr>
-              <a:t>Prefix 'be-' — make, cause, around, thoroughly</a:t>
+              <a:t>Prefix 'be-' — make, cause, or thoroughly</a:t>
             </a:r>
             <a:endParaRPr lang="en-US" sz="1600" dirty="0"/>
           </a:p>
@@ -14286,7 +14418,7 @@
                 <a:ea typeface="Calibri" pitchFamily="34" charset="-122"/>
                 <a:cs typeface="Calibri" pitchFamily="34" charset="-120"/>
               </a:rPr>
-              <a:t>Word Labs  •  wordlabs.app  •  Prefix: 'be-' = make, cause, around, thoroughly</a:t>
+              <a:t>Word Labs  •  wordlabs.app  •  Prefix: 'be-' = make, cause, or thoroughly</a:t>
             </a:r>
             <a:endParaRPr lang="en-US" sz="800" dirty="0"/>
           </a:p>
@@ -14425,7 +14557,7 @@
                 <a:ea typeface="Trebuchet MS" pitchFamily="34" charset="-122"/>
                 <a:cs typeface="Trebuchet MS" pitchFamily="34" charset="-120"/>
               </a:rPr>
-              <a:t>beneath</a:t>
+              <a:t>began</a:t>
             </a:r>
             <a:endParaRPr lang="en-US" sz="2800" dirty="0"/>
           </a:p>
@@ -14603,7 +14735,7 @@
                 <a:ea typeface="Calibri" pitchFamily="34" charset="-122"/>
                 <a:cs typeface="Calibri" pitchFamily="34" charset="-120"/>
               </a:rPr>
-              <a:t>around, below</a:t>
+              <a:t>make or cause</a:t>
             </a:r>
             <a:endParaRPr lang="en-US" sz="850" dirty="0"/>
           </a:p>
@@ -14676,7 +14808,7 @@
                 <a:ea typeface="Trebuchet MS" pitchFamily="34" charset="-122"/>
                 <a:cs typeface="Trebuchet MS" pitchFamily="34" charset="-120"/>
               </a:rPr>
-              <a:t>neath</a:t>
+              <a:t>gan</a:t>
             </a:r>
             <a:endParaRPr lang="en-US" sz="1300" dirty="0"/>
           </a:p>
@@ -14715,7 +14847,7 @@
                 <a:ea typeface="Calibri" pitchFamily="34" charset="-122"/>
                 <a:cs typeface="Calibri" pitchFamily="34" charset="-120"/>
               </a:rPr>
-              <a:t>below, under</a:t>
+              <a:t>old form of 'go' or 'begin'</a:t>
             </a:r>
             <a:endParaRPr lang="en-US" sz="850" dirty="0"/>
           </a:p>
@@ -14979,7 +15111,7 @@
                 <a:ea typeface="Trebuchet MS" pitchFamily="34" charset="-122"/>
                 <a:cs typeface="Trebuchet MS" pitchFamily="34" charset="-120"/>
               </a:rPr>
-              <a:t>neath</a:t>
+              <a:t>gan</a:t>
             </a:r>
             <a:endParaRPr lang="en-US" sz="1400" dirty="0"/>
           </a:p>
@@ -15060,11 +15192,11 @@
         <p:spPr>
           <a:xfrm>
             <a:off x="1874520" y="4096512"/>
-            <a:ext cx="6903720" cy="804672"/>
+            <a:ext cx="6903720" cy="658368"/>
           </a:xfrm>
           <a:prstGeom prst="rect">
             <a:avLst>
-              <a:gd name="adj" fmla="val 6818"/>
+              <a:gd name="adj" fmla="val 8333"/>
             </a:avLst>
           </a:prstGeom>
           <a:solidFill>
@@ -15087,11 +15219,11 @@
         <p:spPr>
           <a:xfrm>
             <a:off x="2427732" y="4169664"/>
-            <a:ext cx="685800" cy="384048"/>
+            <a:ext cx="685800" cy="475488"/>
           </a:xfrm>
           <a:prstGeom prst="rect">
             <a:avLst>
-              <a:gd name="adj" fmla="val 9524"/>
+              <a:gd name="adj" fmla="val 7692"/>
             </a:avLst>
           </a:prstGeom>
           <a:solidFill>
@@ -15114,7 +15246,7 @@
         <p:spPr>
           <a:xfrm>
             <a:off x="2427732" y="4169664"/>
-            <a:ext cx="685800" cy="384048"/>
+            <a:ext cx="685800" cy="475488"/>
           </a:xfrm>
           <a:prstGeom prst="rect">
             <a:avLst/>
@@ -15153,11 +15285,11 @@
         <p:spPr>
           <a:xfrm>
             <a:off x="3639312" y="4169664"/>
-            <a:ext cx="685800" cy="384048"/>
+            <a:ext cx="685800" cy="475488"/>
           </a:xfrm>
           <a:prstGeom prst="rect">
             <a:avLst>
-              <a:gd name="adj" fmla="val 9524"/>
+              <a:gd name="adj" fmla="val 7692"/>
             </a:avLst>
           </a:prstGeom>
           <a:solidFill>
@@ -15180,7 +15312,7 @@
         <p:spPr>
           <a:xfrm>
             <a:off x="3639312" y="4169664"/>
-            <a:ext cx="685800" cy="384048"/>
+            <a:ext cx="685800" cy="475488"/>
           </a:xfrm>
           <a:prstGeom prst="rect">
             <a:avLst/>
@@ -15219,11 +15351,11 @@
         <p:spPr>
           <a:xfrm>
             <a:off x="4850892" y="4169664"/>
-            <a:ext cx="685800" cy="384048"/>
+            <a:ext cx="685800" cy="475488"/>
           </a:xfrm>
           <a:prstGeom prst="rect">
             <a:avLst>
-              <a:gd name="adj" fmla="val 9524"/>
+              <a:gd name="adj" fmla="val 7692"/>
             </a:avLst>
           </a:prstGeom>
           <a:solidFill>
@@ -15246,7 +15378,7 @@
         <p:spPr>
           <a:xfrm>
             <a:off x="4850892" y="4169664"/>
-            <a:ext cx="685800" cy="384048"/>
+            <a:ext cx="685800" cy="475488"/>
           </a:xfrm>
           <a:prstGeom prst="rect">
             <a:avLst/>
@@ -15270,7 +15402,7 @@
                 <a:ea typeface="Trebuchet MS" pitchFamily="34" charset="-122"/>
                 <a:cs typeface="Trebuchet MS" pitchFamily="34" charset="-120"/>
               </a:rPr>
-              <a:t>n</a:t>
+              <a:t>g</a:t>
             </a:r>
             <a:endParaRPr lang="en-US" sz="900" dirty="0"/>
           </a:p>
@@ -15285,11 +15417,11 @@
         <p:spPr>
           <a:xfrm>
             <a:off x="6062472" y="4169664"/>
-            <a:ext cx="685800" cy="384048"/>
+            <a:ext cx="685800" cy="475488"/>
           </a:xfrm>
           <a:prstGeom prst="rect">
             <a:avLst>
-              <a:gd name="adj" fmla="val 9524"/>
+              <a:gd name="adj" fmla="val 7692"/>
             </a:avLst>
           </a:prstGeom>
           <a:solidFill>
@@ -15312,7 +15444,7 @@
         <p:spPr>
           <a:xfrm>
             <a:off x="6062472" y="4169664"/>
-            <a:ext cx="685800" cy="384048"/>
+            <a:ext cx="685800" cy="475488"/>
           </a:xfrm>
           <a:prstGeom prst="rect">
             <a:avLst/>
@@ -15336,7 +15468,7 @@
                 <a:ea typeface="Trebuchet MS" pitchFamily="34" charset="-122"/>
                 <a:cs typeface="Trebuchet MS" pitchFamily="34" charset="-120"/>
               </a:rPr>
-              <a:t>ea</a:t>
+              <a:t>a</a:t>
             </a:r>
             <a:endParaRPr lang="en-US" sz="900" dirty="0"/>
           </a:p>
@@ -15344,57 +15476,18 @@
       </p:sp>
       <p:sp>
         <p:nvSpPr>
-          <p:cNvPr id="41" name="Text 39"/>
-          <p:cNvSpPr/>
-          <p:nvPr/>
-        </p:nvSpPr>
-        <p:spPr>
-          <a:xfrm>
-            <a:off x="6062472" y="4572000"/>
-            <a:ext cx="685800" cy="219456"/>
-          </a:xfrm>
-          <a:prstGeom prst="rect">
-            <a:avLst/>
-          </a:prstGeom>
-          <a:noFill/>
-          <a:ln/>
-        </p:spPr>
-        <p:txBody>
-          <a:bodyPr wrap="square" lIns="0" tIns="0" rIns="0" bIns="0" rtlCol="0" anchor="t"/>
-          <a:lstStyle/>
-          <a:p>
-            <a:pPr algn="ctr" indent="0" marL="0">
-              <a:buNone/>
-            </a:pPr>
-            <a:r>
-              <a:rPr lang="en-US" sz="750" i="1" dirty="0">
-                <a:solidFill>
-                  <a:srgbClr val="94A3B8"/>
-                </a:solidFill>
-                <a:latin typeface="Calibri" pitchFamily="34" charset="0"/>
-                <a:ea typeface="Calibri" pitchFamily="34" charset="-122"/>
-                <a:cs typeface="Calibri" pitchFamily="34" charset="-120"/>
-              </a:rPr>
-              <a:t>/ee/</a:t>
-            </a:r>
-            <a:endParaRPr lang="en-US" sz="750" dirty="0"/>
-          </a:p>
-        </p:txBody>
-      </p:sp>
-      <p:sp>
-        <p:nvSpPr>
-          <p:cNvPr id="42" name="Shape 40"/>
+          <p:cNvPr id="41" name="Shape 39"/>
           <p:cNvSpPr/>
           <p:nvPr/>
         </p:nvSpPr>
         <p:spPr>
           <a:xfrm>
             <a:off x="7274052" y="4169664"/>
-            <a:ext cx="685800" cy="384048"/>
+            <a:ext cx="685800" cy="475488"/>
           </a:xfrm>
           <a:prstGeom prst="rect">
             <a:avLst>
-              <a:gd name="adj" fmla="val 9524"/>
+              <a:gd name="adj" fmla="val 7692"/>
             </a:avLst>
           </a:prstGeom>
           <a:solidFill>
@@ -15410,14 +15503,14 @@
       </p:sp>
       <p:sp>
         <p:nvSpPr>
-          <p:cNvPr id="43" name="Text 41"/>
+          <p:cNvPr id="42" name="Text 40"/>
           <p:cNvSpPr/>
           <p:nvPr/>
         </p:nvSpPr>
         <p:spPr>
           <a:xfrm>
             <a:off x="7274052" y="4169664"/>
-            <a:ext cx="685800" cy="384048"/>
+            <a:ext cx="685800" cy="475488"/>
           </a:xfrm>
           <a:prstGeom prst="rect">
             <a:avLst/>
@@ -15441,7 +15534,7 @@
                 <a:ea typeface="Trebuchet MS" pitchFamily="34" charset="-122"/>
                 <a:cs typeface="Trebuchet MS" pitchFamily="34" charset="-120"/>
               </a:rPr>
-              <a:t>th</a:t>
+              <a:t>n</a:t>
             </a:r>
             <a:endParaRPr lang="en-US" sz="900" dirty="0"/>
           </a:p>
@@ -16015,7 +16108,7 @@
                 <a:ea typeface="Calibri" pitchFamily="34" charset="-122"/>
                 <a:cs typeface="Calibri" pitchFamily="34" charset="-120"/>
               </a:rPr>
-              <a:t>Word Labs  •  wordlabs.app  •  Prefix: 'be-' = make, cause, around, thoroughly</a:t>
+              <a:t>Word Labs  •  wordlabs.app  •  Prefix: 'be-' = make, cause, or thoroughly</a:t>
             </a:r>
             <a:endParaRPr lang="en-US" sz="800" dirty="0"/>
           </a:p>
@@ -16655,7 +16748,7 @@
                 <a:ea typeface="Calibri" pitchFamily="34" charset="-122"/>
                 <a:cs typeface="Calibri" pitchFamily="34" charset="-120"/>
               </a:rPr>
-              <a:t>Word Labs  •  wordlabs.app  •  Prefix: 'be-' = make, cause, around, thoroughly</a:t>
+              <a:t>Word Labs  •  wordlabs.app  •  Prefix: 'be-' = make, cause, or thoroughly</a:t>
             </a:r>
             <a:endParaRPr lang="en-US" sz="800" dirty="0"/>
           </a:p>
@@ -16767,7 +16860,7 @@
                 <a:ea typeface="Calibri" pitchFamily="34" charset="-122"/>
                 <a:cs typeface="Calibri" pitchFamily="34" charset="-120"/>
               </a:rPr>
-              <a:t>She started to </a:t>
+              <a:t>The </a:t>
             </a:r>
             <a:pPr algn="l" indent="0" marL="0">
               <a:buNone/>
@@ -16784,7 +16877,7 @@
                 <a:ea typeface="Calibri" pitchFamily="34" charset="-122"/>
                 <a:cs typeface="Calibri" pitchFamily="34" charset="-120"/>
               </a:rPr>
-              <a:t>behave</a:t>
+              <a:t>beloved</a:t>
             </a:r>
             <a:pPr algn="l" indent="0" marL="0">
               <a:buNone/>
@@ -16798,7 +16891,7 @@
                 <a:ea typeface="Calibri" pitchFamily="34" charset="-122"/>
                 <a:cs typeface="Calibri" pitchFamily="34" charset="-120"/>
               </a:rPr>
-              <a:t> better after she began to </a:t>
+              <a:t> teacher reminded us to </a:t>
             </a:r>
             <a:pPr algn="l" indent="0" marL="0">
               <a:buNone/>
@@ -16815,7 +16908,7 @@
                 <a:ea typeface="Calibri" pitchFamily="34" charset="-122"/>
                 <a:cs typeface="Calibri" pitchFamily="34" charset="-120"/>
               </a:rPr>
-              <a:t>believe</a:t>
+              <a:t>behave</a:t>
             </a:r>
             <a:pPr algn="l" indent="0" marL="0">
               <a:buNone/>
@@ -16829,7 +16922,7 @@
                 <a:ea typeface="Calibri" pitchFamily="34" charset="-122"/>
                 <a:cs typeface="Calibri" pitchFamily="34" charset="-120"/>
               </a:rPr>
-              <a:t> in herself, and soon she would </a:t>
+              <a:t> sensibly and to </a:t>
             </a:r>
             <a:pPr algn="l" indent="0" marL="0">
               <a:buNone/>
@@ -16846,7 +16939,7 @@
                 <a:ea typeface="Calibri" pitchFamily="34" charset="-122"/>
                 <a:cs typeface="Calibri" pitchFamily="34" charset="-120"/>
               </a:rPr>
-              <a:t>become</a:t>
+              <a:t>beware</a:t>
             </a:r>
             <a:pPr algn="l" indent="0" marL="0">
               <a:buNone/>
@@ -16860,7 +16953,7 @@
                 <a:ea typeface="Calibri" pitchFamily="34" charset="-122"/>
                 <a:cs typeface="Calibri" pitchFamily="34" charset="-120"/>
               </a:rPr>
-              <a:t> a confident leader.</a:t>
+              <a:t> of the icy path outside.</a:t>
             </a:r>
             <a:endParaRPr lang="en-US" sz="1800" dirty="0"/>
           </a:p>
@@ -17015,7 +17108,7 @@
                 <a:ea typeface="Trebuchet MS" pitchFamily="34" charset="-122"/>
                 <a:cs typeface="Trebuchet MS" pitchFamily="34" charset="-120"/>
               </a:rPr>
-              <a:t>behave</a:t>
+              <a:t>beloved</a:t>
             </a:r>
             <a:endParaRPr lang="en-US" sz="1400" dirty="0"/>
           </a:p>
@@ -17143,7 +17236,7 @@
                 <a:ea typeface="Trebuchet MS" pitchFamily="34" charset="-122"/>
                 <a:cs typeface="Trebuchet MS" pitchFamily="34" charset="-120"/>
               </a:rPr>
-              <a:t>believe</a:t>
+              <a:t>behave</a:t>
             </a:r>
             <a:endParaRPr lang="en-US" sz="1400" dirty="0"/>
           </a:p>
@@ -17271,7 +17364,7 @@
                 <a:ea typeface="Trebuchet MS" pitchFamily="34" charset="-122"/>
                 <a:cs typeface="Trebuchet MS" pitchFamily="34" charset="-120"/>
               </a:rPr>
-              <a:t>become</a:t>
+              <a:t>beware</a:t>
             </a:r>
             <a:endParaRPr lang="en-US" sz="1400" dirty="0"/>
           </a:p>
@@ -17602,7 +17695,7 @@
                 <a:ea typeface="Calibri" pitchFamily="34" charset="-122"/>
                 <a:cs typeface="Calibri" pitchFamily="34" charset="-120"/>
               </a:rPr>
-              <a:t>Word Labs  •  wordlabs.app  •  Prefix: 'be-' = make, cause, around, thoroughly</a:t>
+              <a:t>Word Labs  •  wordlabs.app  •  Prefix: 'be-' = make, cause, or thoroughly</a:t>
             </a:r>
             <a:endParaRPr lang="en-US" sz="800" dirty="0"/>
           </a:p>
@@ -17741,7 +17834,7 @@
                 <a:ea typeface="Trebuchet MS" pitchFamily="34" charset="-122"/>
                 <a:cs typeface="Trebuchet MS" pitchFamily="34" charset="-120"/>
               </a:rPr>
-              <a:t>behave</a:t>
+              <a:t>beloved</a:t>
             </a:r>
             <a:endParaRPr lang="en-US" sz="2800" dirty="0"/>
           </a:p>
@@ -18429,7 +18522,7 @@
                 <a:ea typeface="Calibri" pitchFamily="34" charset="-122"/>
                 <a:cs typeface="Calibri" pitchFamily="34" charset="-120"/>
               </a:rPr>
-              <a:t>Word Labs  •  wordlabs.app  •  Prefix: 'be-' = make, cause, around, thoroughly</a:t>
+              <a:t>Word Labs  •  wordlabs.app  •  Prefix: 'be-' = make, cause, or thoroughly</a:t>
             </a:r>
             <a:endParaRPr lang="en-US" sz="800" dirty="0"/>
           </a:p>
@@ -18568,7 +18661,7 @@
                 <a:ea typeface="Trebuchet MS" pitchFamily="34" charset="-122"/>
                 <a:cs typeface="Trebuchet MS" pitchFamily="34" charset="-120"/>
               </a:rPr>
-              <a:t>behave</a:t>
+              <a:t>beloved</a:t>
             </a:r>
             <a:endParaRPr lang="en-US" sz="2800" dirty="0"/>
           </a:p>
@@ -18648,7 +18741,7 @@
         </p:nvSpPr>
         <p:spPr>
           <a:xfrm>
-            <a:off x="2938272" y="2258568"/>
+            <a:off x="2221992" y="2258568"/>
             <a:ext cx="1828800" cy="292608"/>
           </a:xfrm>
           <a:prstGeom prst="rect">
@@ -18682,7 +18775,7 @@
         </p:nvSpPr>
         <p:spPr>
           <a:xfrm>
-            <a:off x="2938272" y="2258568"/>
+            <a:off x="2221992" y="2258568"/>
             <a:ext cx="1828800" cy="292608"/>
           </a:xfrm>
           <a:prstGeom prst="rect">
@@ -18721,7 +18814,7 @@
         </p:nvSpPr>
         <p:spPr>
           <a:xfrm>
-            <a:off x="2938272" y="2569464"/>
+            <a:off x="2221992" y="2569464"/>
             <a:ext cx="1828800" cy="201168"/>
           </a:xfrm>
           <a:prstGeom prst="rect">
@@ -18746,7 +18839,7 @@
                 <a:ea typeface="Calibri" pitchFamily="34" charset="-122"/>
                 <a:cs typeface="Calibri" pitchFamily="34" charset="-120"/>
               </a:rPr>
-              <a:t>make, cause</a:t>
+              <a:t>thoroughly or completely</a:t>
             </a:r>
             <a:endParaRPr lang="en-US" sz="850" dirty="0"/>
           </a:p>
@@ -18760,7 +18853,7 @@
         </p:nvSpPr>
         <p:spPr>
           <a:xfrm>
-            <a:off x="5803392" y="2258568"/>
+            <a:off x="4370832" y="2258568"/>
             <a:ext cx="1828800" cy="292608"/>
           </a:xfrm>
           <a:prstGeom prst="rect">
@@ -18794,7 +18887,7 @@
         </p:nvSpPr>
         <p:spPr>
           <a:xfrm>
-            <a:off x="5803392" y="2258568"/>
+            <a:off x="4370832" y="2258568"/>
             <a:ext cx="1828800" cy="292608"/>
           </a:xfrm>
           <a:prstGeom prst="rect">
@@ -18819,7 +18912,7 @@
                 <a:ea typeface="Trebuchet MS" pitchFamily="34" charset="-122"/>
                 <a:cs typeface="Trebuchet MS" pitchFamily="34" charset="-120"/>
               </a:rPr>
-              <a:t>have</a:t>
+              <a:t>love</a:t>
             </a:r>
             <a:endParaRPr lang="en-US" sz="1300" dirty="0"/>
           </a:p>
@@ -18833,7 +18926,7 @@
         </p:nvSpPr>
         <p:spPr>
           <a:xfrm>
-            <a:off x="5803392" y="2569464"/>
+            <a:off x="4370832" y="2569464"/>
             <a:ext cx="1828800" cy="201168"/>
           </a:xfrm>
           <a:prstGeom prst="rect">
@@ -18858,7 +18951,7 @@
                 <a:ea typeface="Calibri" pitchFamily="34" charset="-122"/>
                 <a:cs typeface="Calibri" pitchFamily="34" charset="-120"/>
               </a:rPr>
-              <a:t>to hold or carry oneself</a:t>
+              <a:t>to feel deep affection</a:t>
             </a:r>
             <a:endParaRPr lang="en-US" sz="850" dirty="0"/>
           </a:p>
@@ -18867,6 +18960,157 @@
       <p:sp>
         <p:nvSpPr>
           <p:cNvPr id="22" name="Shape 20"/>
+          <p:cNvSpPr/>
+          <p:nvPr/>
+        </p:nvSpPr>
+        <p:spPr>
+          <a:xfrm>
+            <a:off x="6519672" y="2258568"/>
+            <a:ext cx="1828800" cy="292608"/>
+          </a:xfrm>
+          <a:prstGeom prst="rect">
+            <a:avLst>
+              <a:gd name="adj" fmla="val 25000"/>
+            </a:avLst>
+          </a:prstGeom>
+          <a:solidFill>
+            <a:srgbClr val="FCE7F3"/>
+          </a:solidFill>
+          <a:ln w="19050">
+            <a:solidFill>
+              <a:srgbClr val="DB2777"/>
+            </a:solidFill>
+            <a:prstDash val="solid"/>
+          </a:ln>
+          <a:effectLst>
+            <a:outerShdw sx="100000" sy="100000" kx="0" ky="0" algn="bl" rotWithShape="0" blurRad="101600" dist="38100" dir="8100000">
+              <a:srgbClr val="000000">
+                <a:alpha val="12000"/>
+              </a:srgbClr>
+            </a:outerShdw>
+          </a:effectLst>
+        </p:spPr>
+      </p:sp>
+      <p:sp>
+        <p:nvSpPr>
+          <p:cNvPr id="23" name="Text 21"/>
+          <p:cNvSpPr/>
+          <p:nvPr/>
+        </p:nvSpPr>
+        <p:spPr>
+          <a:xfrm>
+            <a:off x="6519672" y="2258568"/>
+            <a:ext cx="1828800" cy="292608"/>
+          </a:xfrm>
+          <a:prstGeom prst="rect">
+            <a:avLst/>
+          </a:prstGeom>
+          <a:noFill/>
+          <a:ln/>
+        </p:spPr>
+        <p:txBody>
+          <a:bodyPr wrap="square" lIns="0" tIns="0" rIns="0" bIns="0" rtlCol="0" anchor="ctr"/>
+          <a:lstStyle/>
+          <a:p>
+            <a:pPr algn="ctr" indent="0" marL="0">
+              <a:buNone/>
+            </a:pPr>
+            <a:r>
+              <a:rPr lang="en-US" sz="1300" b="1" dirty="0">
+                <a:solidFill>
+                  <a:srgbClr val="9D174D"/>
+                </a:solidFill>
+                <a:latin typeface="Trebuchet MS" pitchFamily="34" charset="0"/>
+                <a:ea typeface="Trebuchet MS" pitchFamily="34" charset="-122"/>
+                <a:cs typeface="Trebuchet MS" pitchFamily="34" charset="-120"/>
+              </a:rPr>
+              <a:t>d</a:t>
+            </a:r>
+            <a:endParaRPr lang="en-US" sz="1300" dirty="0"/>
+          </a:p>
+        </p:txBody>
+      </p:sp>
+      <p:sp>
+        <p:nvSpPr>
+          <p:cNvPr id="24" name="Text 22"/>
+          <p:cNvSpPr/>
+          <p:nvPr/>
+        </p:nvSpPr>
+        <p:spPr>
+          <a:xfrm>
+            <a:off x="6519672" y="2569464"/>
+            <a:ext cx="1828800" cy="201168"/>
+          </a:xfrm>
+          <a:prstGeom prst="rect">
+            <a:avLst/>
+          </a:prstGeom>
+          <a:noFill/>
+          <a:ln/>
+        </p:spPr>
+        <p:txBody>
+          <a:bodyPr wrap="square" lIns="0" tIns="0" rIns="0" bIns="0" rtlCol="0" anchor="t"/>
+          <a:lstStyle/>
+          <a:p>
+            <a:pPr algn="ctr" indent="0" marL="0">
+              <a:buNone/>
+            </a:pPr>
+            <a:r>
+              <a:rPr lang="en-US" sz="850" dirty="0">
+                <a:solidFill>
+                  <a:srgbClr val="475569"/>
+                </a:solidFill>
+                <a:latin typeface="Calibri" pitchFamily="34" charset="0"/>
+                <a:ea typeface="Calibri" pitchFamily="34" charset="-122"/>
+                <a:cs typeface="Calibri" pitchFamily="34" charset="-120"/>
+              </a:rPr>
+              <a:t>past tense</a:t>
+            </a:r>
+            <a:endParaRPr lang="en-US" sz="850" dirty="0"/>
+          </a:p>
+        </p:txBody>
+      </p:sp>
+      <p:sp>
+        <p:nvSpPr>
+          <p:cNvPr id="25" name="Text 23"/>
+          <p:cNvSpPr/>
+          <p:nvPr/>
+        </p:nvSpPr>
+        <p:spPr>
+          <a:xfrm>
+            <a:off x="6519672" y="2752344"/>
+            <a:ext cx="1828800" cy="182880"/>
+          </a:xfrm>
+          <a:prstGeom prst="rect">
+            <a:avLst/>
+          </a:prstGeom>
+          <a:noFill/>
+          <a:ln/>
+        </p:spPr>
+        <p:txBody>
+          <a:bodyPr wrap="square" lIns="0" tIns="0" rIns="0" bIns="0" rtlCol="0" anchor="t"/>
+          <a:lstStyle/>
+          <a:p>
+            <a:pPr algn="ctr" indent="0" marL="0">
+              <a:buNone/>
+            </a:pPr>
+            <a:r>
+              <a:rPr lang="en-US" sz="700" i="1" dirty="0">
+                <a:solidFill>
+                  <a:srgbClr val="94A3B8"/>
+                </a:solidFill>
+                <a:latin typeface="Calibri" pitchFamily="34" charset="0"/>
+                <a:ea typeface="Calibri" pitchFamily="34" charset="-122"/>
+                <a:cs typeface="Calibri" pitchFamily="34" charset="-120"/>
+              </a:rPr>
+              <a:t>'e' dropped before vowel suffix</a:t>
+            </a:r>
+            <a:endParaRPr lang="en-US" sz="700" dirty="0"/>
+          </a:p>
+        </p:txBody>
+      </p:sp>
+      <p:sp>
+        <p:nvSpPr>
+          <p:cNvPr id="26" name="Shape 24"/>
           <p:cNvSpPr/>
           <p:nvPr/>
         </p:nvSpPr>
@@ -18893,7 +19137,7 @@
       </p:sp>
       <p:sp>
         <p:nvSpPr>
-          <p:cNvPr id="23" name="Text 21"/>
+          <p:cNvPr id="27" name="Text 25"/>
           <p:cNvSpPr/>
           <p:nvPr/>
         </p:nvSpPr>
@@ -18932,7 +19176,7 @@
       </p:sp>
       <p:sp>
         <p:nvSpPr>
-          <p:cNvPr id="24" name="Shape 22"/>
+          <p:cNvPr id="28" name="Shape 26"/>
           <p:cNvSpPr/>
           <p:nvPr/>
         </p:nvSpPr>
@@ -18959,7 +19203,7 @@
       </p:sp>
       <p:sp>
         <p:nvSpPr>
-          <p:cNvPr id="25" name="Text 23"/>
+          <p:cNvPr id="29" name="Text 27"/>
           <p:cNvSpPr/>
           <p:nvPr/>
         </p:nvSpPr>
@@ -18998,7 +19242,7 @@
       </p:sp>
       <p:sp>
         <p:nvSpPr>
-          <p:cNvPr id="26" name="Shape 24"/>
+          <p:cNvPr id="30" name="Shape 28"/>
           <p:cNvSpPr/>
           <p:nvPr/>
         </p:nvSpPr>
@@ -19025,7 +19269,7 @@
       </p:sp>
       <p:sp>
         <p:nvSpPr>
-          <p:cNvPr id="27" name="Text 25"/>
+          <p:cNvPr id="31" name="Text 29"/>
           <p:cNvSpPr/>
           <p:nvPr/>
         </p:nvSpPr>
@@ -19064,7 +19308,7 @@
       </p:sp>
       <p:sp>
         <p:nvSpPr>
-          <p:cNvPr id="28" name="Shape 26"/>
+          <p:cNvPr id="32" name="Shape 30"/>
           <p:cNvSpPr/>
           <p:nvPr/>
         </p:nvSpPr>
@@ -19091,7 +19335,7 @@
       </p:sp>
       <p:sp>
         <p:nvSpPr>
-          <p:cNvPr id="29" name="Text 27"/>
+          <p:cNvPr id="33" name="Text 31"/>
           <p:cNvSpPr/>
           <p:nvPr/>
         </p:nvSpPr>
@@ -19414,7 +19658,7 @@
                 <a:ea typeface="Calibri" pitchFamily="34" charset="-122"/>
                 <a:cs typeface="Calibri" pitchFamily="34" charset="-120"/>
               </a:rPr>
-              <a:t>Word Labs  •  wordlabs.app  •  Prefix: 'be-' = make, cause, around, thoroughly</a:t>
+              <a:t>Word Labs  •  wordlabs.app  •  Prefix: 'be-' = make, cause, or thoroughly</a:t>
             </a:r>
             <a:endParaRPr lang="en-US" sz="800" dirty="0"/>
           </a:p>
@@ -19553,7 +19797,7 @@
                 <a:ea typeface="Trebuchet MS" pitchFamily="34" charset="-122"/>
                 <a:cs typeface="Trebuchet MS" pitchFamily="34" charset="-120"/>
               </a:rPr>
-              <a:t>behave</a:t>
+              <a:t>beloved</a:t>
             </a:r>
             <a:endParaRPr lang="en-US" sz="2800" dirty="0"/>
           </a:p>
@@ -19633,7 +19877,7 @@
         </p:nvSpPr>
         <p:spPr>
           <a:xfrm>
-            <a:off x="2938272" y="2258568"/>
+            <a:off x="2221992" y="2258568"/>
             <a:ext cx="1828800" cy="292608"/>
           </a:xfrm>
           <a:prstGeom prst="rect">
@@ -19667,7 +19911,7 @@
         </p:nvSpPr>
         <p:spPr>
           <a:xfrm>
-            <a:off x="2938272" y="2258568"/>
+            <a:off x="2221992" y="2258568"/>
             <a:ext cx="1828800" cy="292608"/>
           </a:xfrm>
           <a:prstGeom prst="rect">
@@ -19706,7 +19950,7 @@
         </p:nvSpPr>
         <p:spPr>
           <a:xfrm>
-            <a:off x="2938272" y="2569464"/>
+            <a:off x="2221992" y="2569464"/>
             <a:ext cx="1828800" cy="201168"/>
           </a:xfrm>
           <a:prstGeom prst="rect">
@@ -19731,7 +19975,7 @@
                 <a:ea typeface="Calibri" pitchFamily="34" charset="-122"/>
                 <a:cs typeface="Calibri" pitchFamily="34" charset="-120"/>
               </a:rPr>
-              <a:t>make, cause</a:t>
+              <a:t>thoroughly or completely</a:t>
             </a:r>
             <a:endParaRPr lang="en-US" sz="850" dirty="0"/>
           </a:p>
@@ -19745,7 +19989,7 @@
         </p:nvSpPr>
         <p:spPr>
           <a:xfrm>
-            <a:off x="5803392" y="2258568"/>
+            <a:off x="4370832" y="2258568"/>
             <a:ext cx="1828800" cy="292608"/>
           </a:xfrm>
           <a:prstGeom prst="rect">
@@ -19779,7 +20023,7 @@
         </p:nvSpPr>
         <p:spPr>
           <a:xfrm>
-            <a:off x="5803392" y="2258568"/>
+            <a:off x="4370832" y="2258568"/>
             <a:ext cx="1828800" cy="292608"/>
           </a:xfrm>
           <a:prstGeom prst="rect">
@@ -19804,7 +20048,7 @@
                 <a:ea typeface="Trebuchet MS" pitchFamily="34" charset="-122"/>
                 <a:cs typeface="Trebuchet MS" pitchFamily="34" charset="-120"/>
               </a:rPr>
-              <a:t>have</a:t>
+              <a:t>love</a:t>
             </a:r>
             <a:endParaRPr lang="en-US" sz="1300" dirty="0"/>
           </a:p>
@@ -19818,7 +20062,7 @@
         </p:nvSpPr>
         <p:spPr>
           <a:xfrm>
-            <a:off x="5803392" y="2569464"/>
+            <a:off x="4370832" y="2569464"/>
             <a:ext cx="1828800" cy="201168"/>
           </a:xfrm>
           <a:prstGeom prst="rect">
@@ -19843,7 +20087,7 @@
                 <a:ea typeface="Calibri" pitchFamily="34" charset="-122"/>
                 <a:cs typeface="Calibri" pitchFamily="34" charset="-120"/>
               </a:rPr>
-              <a:t>to hold or carry oneself</a:t>
+              <a:t>to feel deep affection</a:t>
             </a:r>
             <a:endParaRPr lang="en-US" sz="850" dirty="0"/>
           </a:p>
@@ -19852,6 +20096,157 @@
       <p:sp>
         <p:nvSpPr>
           <p:cNvPr id="22" name="Shape 20"/>
+          <p:cNvSpPr/>
+          <p:nvPr/>
+        </p:nvSpPr>
+        <p:spPr>
+          <a:xfrm>
+            <a:off x="6519672" y="2258568"/>
+            <a:ext cx="1828800" cy="292608"/>
+          </a:xfrm>
+          <a:prstGeom prst="rect">
+            <a:avLst>
+              <a:gd name="adj" fmla="val 25000"/>
+            </a:avLst>
+          </a:prstGeom>
+          <a:solidFill>
+            <a:srgbClr val="FCE7F3"/>
+          </a:solidFill>
+          <a:ln w="19050">
+            <a:solidFill>
+              <a:srgbClr val="DB2777"/>
+            </a:solidFill>
+            <a:prstDash val="solid"/>
+          </a:ln>
+          <a:effectLst>
+            <a:outerShdw sx="100000" sy="100000" kx="0" ky="0" algn="bl" rotWithShape="0" blurRad="101600" dist="38100" dir="8100000">
+              <a:srgbClr val="000000">
+                <a:alpha val="12000"/>
+              </a:srgbClr>
+            </a:outerShdw>
+          </a:effectLst>
+        </p:spPr>
+      </p:sp>
+      <p:sp>
+        <p:nvSpPr>
+          <p:cNvPr id="23" name="Text 21"/>
+          <p:cNvSpPr/>
+          <p:nvPr/>
+        </p:nvSpPr>
+        <p:spPr>
+          <a:xfrm>
+            <a:off x="6519672" y="2258568"/>
+            <a:ext cx="1828800" cy="292608"/>
+          </a:xfrm>
+          <a:prstGeom prst="rect">
+            <a:avLst/>
+          </a:prstGeom>
+          <a:noFill/>
+          <a:ln/>
+        </p:spPr>
+        <p:txBody>
+          <a:bodyPr wrap="square" lIns="0" tIns="0" rIns="0" bIns="0" rtlCol="0" anchor="ctr"/>
+          <a:lstStyle/>
+          <a:p>
+            <a:pPr algn="ctr" indent="0" marL="0">
+              <a:buNone/>
+            </a:pPr>
+            <a:r>
+              <a:rPr lang="en-US" sz="1300" b="1" dirty="0">
+                <a:solidFill>
+                  <a:srgbClr val="9D174D"/>
+                </a:solidFill>
+                <a:latin typeface="Trebuchet MS" pitchFamily="34" charset="0"/>
+                <a:ea typeface="Trebuchet MS" pitchFamily="34" charset="-122"/>
+                <a:cs typeface="Trebuchet MS" pitchFamily="34" charset="-120"/>
+              </a:rPr>
+              <a:t>d</a:t>
+            </a:r>
+            <a:endParaRPr lang="en-US" sz="1300" dirty="0"/>
+          </a:p>
+        </p:txBody>
+      </p:sp>
+      <p:sp>
+        <p:nvSpPr>
+          <p:cNvPr id="24" name="Text 22"/>
+          <p:cNvSpPr/>
+          <p:nvPr/>
+        </p:nvSpPr>
+        <p:spPr>
+          <a:xfrm>
+            <a:off x="6519672" y="2569464"/>
+            <a:ext cx="1828800" cy="201168"/>
+          </a:xfrm>
+          <a:prstGeom prst="rect">
+            <a:avLst/>
+          </a:prstGeom>
+          <a:noFill/>
+          <a:ln/>
+        </p:spPr>
+        <p:txBody>
+          <a:bodyPr wrap="square" lIns="0" tIns="0" rIns="0" bIns="0" rtlCol="0" anchor="t"/>
+          <a:lstStyle/>
+          <a:p>
+            <a:pPr algn="ctr" indent="0" marL="0">
+              <a:buNone/>
+            </a:pPr>
+            <a:r>
+              <a:rPr lang="en-US" sz="850" dirty="0">
+                <a:solidFill>
+                  <a:srgbClr val="475569"/>
+                </a:solidFill>
+                <a:latin typeface="Calibri" pitchFamily="34" charset="0"/>
+                <a:ea typeface="Calibri" pitchFamily="34" charset="-122"/>
+                <a:cs typeface="Calibri" pitchFamily="34" charset="-120"/>
+              </a:rPr>
+              <a:t>past tense</a:t>
+            </a:r>
+            <a:endParaRPr lang="en-US" sz="850" dirty="0"/>
+          </a:p>
+        </p:txBody>
+      </p:sp>
+      <p:sp>
+        <p:nvSpPr>
+          <p:cNvPr id="25" name="Text 23"/>
+          <p:cNvSpPr/>
+          <p:nvPr/>
+        </p:nvSpPr>
+        <p:spPr>
+          <a:xfrm>
+            <a:off x="6519672" y="2752344"/>
+            <a:ext cx="1828800" cy="182880"/>
+          </a:xfrm>
+          <a:prstGeom prst="rect">
+            <a:avLst/>
+          </a:prstGeom>
+          <a:noFill/>
+          <a:ln/>
+        </p:spPr>
+        <p:txBody>
+          <a:bodyPr wrap="square" lIns="0" tIns="0" rIns="0" bIns="0" rtlCol="0" anchor="t"/>
+          <a:lstStyle/>
+          <a:p>
+            <a:pPr algn="ctr" indent="0" marL="0">
+              <a:buNone/>
+            </a:pPr>
+            <a:r>
+              <a:rPr lang="en-US" sz="700" i="1" dirty="0">
+                <a:solidFill>
+                  <a:srgbClr val="94A3B8"/>
+                </a:solidFill>
+                <a:latin typeface="Calibri" pitchFamily="34" charset="0"/>
+                <a:ea typeface="Calibri" pitchFamily="34" charset="-122"/>
+                <a:cs typeface="Calibri" pitchFamily="34" charset="-120"/>
+              </a:rPr>
+              <a:t>'e' dropped before vowel suffix</a:t>
+            </a:r>
+            <a:endParaRPr lang="en-US" sz="700" dirty="0"/>
+          </a:p>
+        </p:txBody>
+      </p:sp>
+      <p:sp>
+        <p:nvSpPr>
+          <p:cNvPr id="26" name="Shape 24"/>
           <p:cNvSpPr/>
           <p:nvPr/>
         </p:nvSpPr>
@@ -19878,7 +20273,7 @@
       </p:sp>
       <p:sp>
         <p:nvSpPr>
-          <p:cNvPr id="23" name="Text 21"/>
+          <p:cNvPr id="27" name="Text 25"/>
           <p:cNvSpPr/>
           <p:nvPr/>
         </p:nvSpPr>
@@ -19917,7 +20312,7 @@
       </p:sp>
       <p:sp>
         <p:nvSpPr>
-          <p:cNvPr id="24" name="Shape 22"/>
+          <p:cNvPr id="28" name="Shape 26"/>
           <p:cNvSpPr/>
           <p:nvPr/>
         </p:nvSpPr>
@@ -19944,13 +20339,13 @@
       </p:sp>
       <p:sp>
         <p:nvSpPr>
-          <p:cNvPr id="25" name="Shape 23"/>
-          <p:cNvSpPr/>
-          <p:nvPr/>
-        </p:nvSpPr>
-        <p:spPr>
-          <a:xfrm>
-            <a:off x="2999232" y="3364992"/>
+          <p:cNvPr id="29" name="Shape 27"/>
+          <p:cNvSpPr/>
+          <p:nvPr/>
+        </p:nvSpPr>
+        <p:spPr>
+          <a:xfrm>
+            <a:off x="2313432" y="3364992"/>
             <a:ext cx="1645920" cy="475488"/>
           </a:xfrm>
           <a:prstGeom prst="rect">
@@ -19971,13 +20366,13 @@
       </p:sp>
       <p:sp>
         <p:nvSpPr>
-          <p:cNvPr id="26" name="Text 24"/>
-          <p:cNvSpPr/>
-          <p:nvPr/>
-        </p:nvSpPr>
-        <p:spPr>
-          <a:xfrm>
-            <a:off x="2999232" y="3364992"/>
+          <p:cNvPr id="30" name="Text 28"/>
+          <p:cNvSpPr/>
+          <p:nvPr/>
+        </p:nvSpPr>
+        <p:spPr>
+          <a:xfrm>
+            <a:off x="2313432" y="3364992"/>
             <a:ext cx="1645920" cy="475488"/>
           </a:xfrm>
           <a:prstGeom prst="rect">
@@ -20010,14 +20405,14 @@
       </p:sp>
       <p:sp>
         <p:nvSpPr>
-          <p:cNvPr id="27" name="Text 25"/>
-          <p:cNvSpPr/>
-          <p:nvPr/>
-        </p:nvSpPr>
-        <p:spPr>
-          <a:xfrm>
-            <a:off x="4645152" y="3364992"/>
-            <a:ext cx="1097280" cy="475488"/>
+          <p:cNvPr id="31" name="Text 29"/>
+          <p:cNvSpPr/>
+          <p:nvPr/>
+        </p:nvSpPr>
+        <p:spPr>
+          <a:xfrm>
+            <a:off x="3959352" y="3364992"/>
+            <a:ext cx="411480" cy="475488"/>
           </a:xfrm>
           <a:prstGeom prst="rect">
             <a:avLst/>
@@ -20049,13 +20444,13 @@
       </p:sp>
       <p:sp>
         <p:nvSpPr>
-          <p:cNvPr id="28" name="Shape 26"/>
-          <p:cNvSpPr/>
-          <p:nvPr/>
-        </p:nvSpPr>
-        <p:spPr>
-          <a:xfrm>
-            <a:off x="5742432" y="3364992"/>
+          <p:cNvPr id="32" name="Shape 30"/>
+          <p:cNvSpPr/>
+          <p:nvPr/>
+        </p:nvSpPr>
+        <p:spPr>
+          <a:xfrm>
+            <a:off x="4370832" y="3364992"/>
             <a:ext cx="1645920" cy="475488"/>
           </a:xfrm>
           <a:prstGeom prst="rect">
@@ -20076,13 +20471,13 @@
       </p:sp>
       <p:sp>
         <p:nvSpPr>
-          <p:cNvPr id="29" name="Text 27"/>
-          <p:cNvSpPr/>
-          <p:nvPr/>
-        </p:nvSpPr>
-        <p:spPr>
-          <a:xfrm>
-            <a:off x="5742432" y="3364992"/>
+          <p:cNvPr id="33" name="Text 31"/>
+          <p:cNvSpPr/>
+          <p:nvPr/>
+        </p:nvSpPr>
+        <p:spPr>
+          <a:xfrm>
+            <a:off x="4370832" y="3364992"/>
             <a:ext cx="1645920" cy="475488"/>
           </a:xfrm>
           <a:prstGeom prst="rect">
@@ -20107,7 +20502,7 @@
                 <a:ea typeface="Trebuchet MS" pitchFamily="34" charset="-122"/>
                 <a:cs typeface="Trebuchet MS" pitchFamily="34" charset="-120"/>
               </a:rPr>
-              <a:t>have</a:t>
+              <a:t>lov</a:t>
             </a:r>
             <a:endParaRPr lang="en-US" sz="1400" dirty="0"/>
           </a:p>
@@ -20115,7 +20510,112 @@
       </p:sp>
       <p:sp>
         <p:nvSpPr>
-          <p:cNvPr id="30" name="Shape 28"/>
+          <p:cNvPr id="34" name="Text 32"/>
+          <p:cNvSpPr/>
+          <p:nvPr/>
+        </p:nvSpPr>
+        <p:spPr>
+          <a:xfrm>
+            <a:off x="6016752" y="3364992"/>
+            <a:ext cx="411480" cy="475488"/>
+          </a:xfrm>
+          <a:prstGeom prst="rect">
+            <a:avLst/>
+          </a:prstGeom>
+          <a:noFill/>
+          <a:ln/>
+        </p:spPr>
+        <p:txBody>
+          <a:bodyPr wrap="square" lIns="0" tIns="0" rIns="0" bIns="0" rtlCol="0" anchor="ctr"/>
+          <a:lstStyle/>
+          <a:p>
+            <a:pPr algn="ctr" indent="0" marL="0">
+              <a:buNone/>
+            </a:pPr>
+            <a:r>
+              <a:rPr lang="en-US" sz="1600" b="1" dirty="0">
+                <a:solidFill>
+                  <a:srgbClr val="0D9488"/>
+                </a:solidFill>
+                <a:latin typeface="Trebuchet MS" pitchFamily="34" charset="0"/>
+                <a:ea typeface="Trebuchet MS" pitchFamily="34" charset="-122"/>
+                <a:cs typeface="Trebuchet MS" pitchFamily="34" charset="-120"/>
+              </a:rPr>
+              <a:t>·</a:t>
+            </a:r>
+            <a:endParaRPr lang="en-US" sz="1600" dirty="0"/>
+          </a:p>
+        </p:txBody>
+      </p:sp>
+      <p:sp>
+        <p:nvSpPr>
+          <p:cNvPr id="35" name="Shape 33"/>
+          <p:cNvSpPr/>
+          <p:nvPr/>
+        </p:nvSpPr>
+        <p:spPr>
+          <a:xfrm>
+            <a:off x="6428232" y="3364992"/>
+            <a:ext cx="1645920" cy="475488"/>
+          </a:xfrm>
+          <a:prstGeom prst="rect">
+            <a:avLst>
+              <a:gd name="adj" fmla="val 9615"/>
+            </a:avLst>
+          </a:prstGeom>
+          <a:solidFill>
+            <a:srgbClr val="FFFFFF"/>
+          </a:solidFill>
+          <a:ln w="12700">
+            <a:solidFill>
+              <a:srgbClr val="0D9488"/>
+            </a:solidFill>
+            <a:prstDash val="solid"/>
+          </a:ln>
+        </p:spPr>
+      </p:sp>
+      <p:sp>
+        <p:nvSpPr>
+          <p:cNvPr id="36" name="Text 34"/>
+          <p:cNvSpPr/>
+          <p:nvPr/>
+        </p:nvSpPr>
+        <p:spPr>
+          <a:xfrm>
+            <a:off x="6428232" y="3364992"/>
+            <a:ext cx="1645920" cy="475488"/>
+          </a:xfrm>
+          <a:prstGeom prst="rect">
+            <a:avLst/>
+          </a:prstGeom>
+          <a:noFill/>
+          <a:ln/>
+        </p:spPr>
+        <p:txBody>
+          <a:bodyPr wrap="square" lIns="0" tIns="0" rIns="0" bIns="0" rtlCol="0" anchor="ctr"/>
+          <a:lstStyle/>
+          <a:p>
+            <a:pPr algn="ctr" indent="0" marL="0">
+              <a:buNone/>
+            </a:pPr>
+            <a:r>
+              <a:rPr lang="en-US" sz="1400" b="1" dirty="0">
+                <a:solidFill>
+                  <a:srgbClr val="0D9488"/>
+                </a:solidFill>
+                <a:latin typeface="Trebuchet MS" pitchFamily="34" charset="0"/>
+                <a:ea typeface="Trebuchet MS" pitchFamily="34" charset="-122"/>
+                <a:cs typeface="Trebuchet MS" pitchFamily="34" charset="-120"/>
+              </a:rPr>
+              <a:t>ed</a:t>
+            </a:r>
+            <a:endParaRPr lang="en-US" sz="1400" dirty="0"/>
+          </a:p>
+        </p:txBody>
+      </p:sp>
+      <p:sp>
+        <p:nvSpPr>
+          <p:cNvPr id="37" name="Shape 35"/>
           <p:cNvSpPr/>
           <p:nvPr/>
         </p:nvSpPr>
@@ -20142,7 +20642,7 @@
       </p:sp>
       <p:sp>
         <p:nvSpPr>
-          <p:cNvPr id="31" name="Text 29"/>
+          <p:cNvPr id="38" name="Text 36"/>
           <p:cNvSpPr/>
           <p:nvPr/>
         </p:nvSpPr>
@@ -20181,7 +20681,7 @@
       </p:sp>
       <p:sp>
         <p:nvSpPr>
-          <p:cNvPr id="32" name="Shape 30"/>
+          <p:cNvPr id="39" name="Shape 37"/>
           <p:cNvSpPr/>
           <p:nvPr/>
         </p:nvSpPr>
@@ -20208,7 +20708,7 @@
       </p:sp>
       <p:sp>
         <p:nvSpPr>
-          <p:cNvPr id="33" name="Text 31"/>
+          <p:cNvPr id="40" name="Text 38"/>
           <p:cNvSpPr/>
           <p:nvPr/>
         </p:nvSpPr>
@@ -20531,7 +21031,7 @@
                 <a:ea typeface="Calibri" pitchFamily="34" charset="-122"/>
                 <a:cs typeface="Calibri" pitchFamily="34" charset="-120"/>
               </a:rPr>
-              <a:t>Word Labs  •  wordlabs.app  •  Prefix: 'be-' = make, cause, around, thoroughly</a:t>
+              <a:t>Word Labs  •  wordlabs.app  •  Prefix: 'be-' = make, cause, or thoroughly</a:t>
             </a:r>
             <a:endParaRPr lang="en-US" sz="800" dirty="0"/>
           </a:p>
@@ -20670,7 +21170,7 @@
                 <a:ea typeface="Trebuchet MS" pitchFamily="34" charset="-122"/>
                 <a:cs typeface="Trebuchet MS" pitchFamily="34" charset="-120"/>
               </a:rPr>
-              <a:t>behave</a:t>
+              <a:t>beloved</a:t>
             </a:r>
             <a:endParaRPr lang="en-US" sz="2800" dirty="0"/>
           </a:p>
@@ -20750,7 +21250,7 @@
         </p:nvSpPr>
         <p:spPr>
           <a:xfrm>
-            <a:off x="2938272" y="2258568"/>
+            <a:off x="2221992" y="2258568"/>
             <a:ext cx="1828800" cy="292608"/>
           </a:xfrm>
           <a:prstGeom prst="rect">
@@ -20784,7 +21284,7 @@
         </p:nvSpPr>
         <p:spPr>
           <a:xfrm>
-            <a:off x="2938272" y="2258568"/>
+            <a:off x="2221992" y="2258568"/>
             <a:ext cx="1828800" cy="292608"/>
           </a:xfrm>
           <a:prstGeom prst="rect">
@@ -20823,7 +21323,7 @@
         </p:nvSpPr>
         <p:spPr>
           <a:xfrm>
-            <a:off x="2938272" y="2569464"/>
+            <a:off x="2221992" y="2569464"/>
             <a:ext cx="1828800" cy="201168"/>
           </a:xfrm>
           <a:prstGeom prst="rect">
@@ -20848,7 +21348,7 @@
                 <a:ea typeface="Calibri" pitchFamily="34" charset="-122"/>
                 <a:cs typeface="Calibri" pitchFamily="34" charset="-120"/>
               </a:rPr>
-              <a:t>make, cause</a:t>
+              <a:t>thoroughly or completely</a:t>
             </a:r>
             <a:endParaRPr lang="en-US" sz="850" dirty="0"/>
           </a:p>
@@ -20862,7 +21362,7 @@
         </p:nvSpPr>
         <p:spPr>
           <a:xfrm>
-            <a:off x="5803392" y="2258568"/>
+            <a:off x="4370832" y="2258568"/>
             <a:ext cx="1828800" cy="292608"/>
           </a:xfrm>
           <a:prstGeom prst="rect">
@@ -20896,7 +21396,7 @@
         </p:nvSpPr>
         <p:spPr>
           <a:xfrm>
-            <a:off x="5803392" y="2258568"/>
+            <a:off x="4370832" y="2258568"/>
             <a:ext cx="1828800" cy="292608"/>
           </a:xfrm>
           <a:prstGeom prst="rect">
@@ -20921,7 +21421,7 @@
                 <a:ea typeface="Trebuchet MS" pitchFamily="34" charset="-122"/>
                 <a:cs typeface="Trebuchet MS" pitchFamily="34" charset="-120"/>
               </a:rPr>
-              <a:t>have</a:t>
+              <a:t>love</a:t>
             </a:r>
             <a:endParaRPr lang="en-US" sz="1300" dirty="0"/>
           </a:p>
@@ -20935,7 +21435,7 @@
         </p:nvSpPr>
         <p:spPr>
           <a:xfrm>
-            <a:off x="5803392" y="2569464"/>
+            <a:off x="4370832" y="2569464"/>
             <a:ext cx="1828800" cy="201168"/>
           </a:xfrm>
           <a:prstGeom prst="rect">
@@ -20960,7 +21460,7 @@
                 <a:ea typeface="Calibri" pitchFamily="34" charset="-122"/>
                 <a:cs typeface="Calibri" pitchFamily="34" charset="-120"/>
               </a:rPr>
-              <a:t>to hold or carry oneself</a:t>
+              <a:t>to feel deep affection</a:t>
             </a:r>
             <a:endParaRPr lang="en-US" sz="850" dirty="0"/>
           </a:p>
@@ -20969,6 +21469,157 @@
       <p:sp>
         <p:nvSpPr>
           <p:cNvPr id="22" name="Shape 20"/>
+          <p:cNvSpPr/>
+          <p:nvPr/>
+        </p:nvSpPr>
+        <p:spPr>
+          <a:xfrm>
+            <a:off x="6519672" y="2258568"/>
+            <a:ext cx="1828800" cy="292608"/>
+          </a:xfrm>
+          <a:prstGeom prst="rect">
+            <a:avLst>
+              <a:gd name="adj" fmla="val 25000"/>
+            </a:avLst>
+          </a:prstGeom>
+          <a:solidFill>
+            <a:srgbClr val="FCE7F3"/>
+          </a:solidFill>
+          <a:ln w="19050">
+            <a:solidFill>
+              <a:srgbClr val="DB2777"/>
+            </a:solidFill>
+            <a:prstDash val="solid"/>
+          </a:ln>
+          <a:effectLst>
+            <a:outerShdw sx="100000" sy="100000" kx="0" ky="0" algn="bl" rotWithShape="0" blurRad="101600" dist="38100" dir="8100000">
+              <a:srgbClr val="000000">
+                <a:alpha val="12000"/>
+              </a:srgbClr>
+            </a:outerShdw>
+          </a:effectLst>
+        </p:spPr>
+      </p:sp>
+      <p:sp>
+        <p:nvSpPr>
+          <p:cNvPr id="23" name="Text 21"/>
+          <p:cNvSpPr/>
+          <p:nvPr/>
+        </p:nvSpPr>
+        <p:spPr>
+          <a:xfrm>
+            <a:off x="6519672" y="2258568"/>
+            <a:ext cx="1828800" cy="292608"/>
+          </a:xfrm>
+          <a:prstGeom prst="rect">
+            <a:avLst/>
+          </a:prstGeom>
+          <a:noFill/>
+          <a:ln/>
+        </p:spPr>
+        <p:txBody>
+          <a:bodyPr wrap="square" lIns="0" tIns="0" rIns="0" bIns="0" rtlCol="0" anchor="ctr"/>
+          <a:lstStyle/>
+          <a:p>
+            <a:pPr algn="ctr" indent="0" marL="0">
+              <a:buNone/>
+            </a:pPr>
+            <a:r>
+              <a:rPr lang="en-US" sz="1300" b="1" dirty="0">
+                <a:solidFill>
+                  <a:srgbClr val="9D174D"/>
+                </a:solidFill>
+                <a:latin typeface="Trebuchet MS" pitchFamily="34" charset="0"/>
+                <a:ea typeface="Trebuchet MS" pitchFamily="34" charset="-122"/>
+                <a:cs typeface="Trebuchet MS" pitchFamily="34" charset="-120"/>
+              </a:rPr>
+              <a:t>d</a:t>
+            </a:r>
+            <a:endParaRPr lang="en-US" sz="1300" dirty="0"/>
+          </a:p>
+        </p:txBody>
+      </p:sp>
+      <p:sp>
+        <p:nvSpPr>
+          <p:cNvPr id="24" name="Text 22"/>
+          <p:cNvSpPr/>
+          <p:nvPr/>
+        </p:nvSpPr>
+        <p:spPr>
+          <a:xfrm>
+            <a:off x="6519672" y="2569464"/>
+            <a:ext cx="1828800" cy="201168"/>
+          </a:xfrm>
+          <a:prstGeom prst="rect">
+            <a:avLst/>
+          </a:prstGeom>
+          <a:noFill/>
+          <a:ln/>
+        </p:spPr>
+        <p:txBody>
+          <a:bodyPr wrap="square" lIns="0" tIns="0" rIns="0" bIns="0" rtlCol="0" anchor="t"/>
+          <a:lstStyle/>
+          <a:p>
+            <a:pPr algn="ctr" indent="0" marL="0">
+              <a:buNone/>
+            </a:pPr>
+            <a:r>
+              <a:rPr lang="en-US" sz="850" dirty="0">
+                <a:solidFill>
+                  <a:srgbClr val="475569"/>
+                </a:solidFill>
+                <a:latin typeface="Calibri" pitchFamily="34" charset="0"/>
+                <a:ea typeface="Calibri" pitchFamily="34" charset="-122"/>
+                <a:cs typeface="Calibri" pitchFamily="34" charset="-120"/>
+              </a:rPr>
+              <a:t>past tense</a:t>
+            </a:r>
+            <a:endParaRPr lang="en-US" sz="850" dirty="0"/>
+          </a:p>
+        </p:txBody>
+      </p:sp>
+      <p:sp>
+        <p:nvSpPr>
+          <p:cNvPr id="25" name="Text 23"/>
+          <p:cNvSpPr/>
+          <p:nvPr/>
+        </p:nvSpPr>
+        <p:spPr>
+          <a:xfrm>
+            <a:off x="6519672" y="2752344"/>
+            <a:ext cx="1828800" cy="182880"/>
+          </a:xfrm>
+          <a:prstGeom prst="rect">
+            <a:avLst/>
+          </a:prstGeom>
+          <a:noFill/>
+          <a:ln/>
+        </p:spPr>
+        <p:txBody>
+          <a:bodyPr wrap="square" lIns="0" tIns="0" rIns="0" bIns="0" rtlCol="0" anchor="t"/>
+          <a:lstStyle/>
+          <a:p>
+            <a:pPr algn="ctr" indent="0" marL="0">
+              <a:buNone/>
+            </a:pPr>
+            <a:r>
+              <a:rPr lang="en-US" sz="700" i="1" dirty="0">
+                <a:solidFill>
+                  <a:srgbClr val="94A3B8"/>
+                </a:solidFill>
+                <a:latin typeface="Calibri" pitchFamily="34" charset="0"/>
+                <a:ea typeface="Calibri" pitchFamily="34" charset="-122"/>
+                <a:cs typeface="Calibri" pitchFamily="34" charset="-120"/>
+              </a:rPr>
+              <a:t>'e' dropped before vowel suffix</a:t>
+            </a:r>
+            <a:endParaRPr lang="en-US" sz="700" dirty="0"/>
+          </a:p>
+        </p:txBody>
+      </p:sp>
+      <p:sp>
+        <p:nvSpPr>
+          <p:cNvPr id="26" name="Shape 24"/>
           <p:cNvSpPr/>
           <p:nvPr/>
         </p:nvSpPr>
@@ -20995,7 +21646,7 @@
       </p:sp>
       <p:sp>
         <p:nvSpPr>
-          <p:cNvPr id="23" name="Text 21"/>
+          <p:cNvPr id="27" name="Text 25"/>
           <p:cNvSpPr/>
           <p:nvPr/>
         </p:nvSpPr>
@@ -21034,7 +21685,7 @@
       </p:sp>
       <p:sp>
         <p:nvSpPr>
-          <p:cNvPr id="24" name="Shape 22"/>
+          <p:cNvPr id="28" name="Shape 26"/>
           <p:cNvSpPr/>
           <p:nvPr/>
         </p:nvSpPr>
@@ -21061,13 +21712,13 @@
       </p:sp>
       <p:sp>
         <p:nvSpPr>
-          <p:cNvPr id="25" name="Shape 23"/>
-          <p:cNvSpPr/>
-          <p:nvPr/>
-        </p:nvSpPr>
-        <p:spPr>
-          <a:xfrm>
-            <a:off x="2999232" y="3364992"/>
+          <p:cNvPr id="29" name="Shape 27"/>
+          <p:cNvSpPr/>
+          <p:nvPr/>
+        </p:nvSpPr>
+        <p:spPr>
+          <a:xfrm>
+            <a:off x="2313432" y="3364992"/>
             <a:ext cx="1645920" cy="475488"/>
           </a:xfrm>
           <a:prstGeom prst="rect">
@@ -21088,13 +21739,13 @@
       </p:sp>
       <p:sp>
         <p:nvSpPr>
-          <p:cNvPr id="26" name="Text 24"/>
-          <p:cNvSpPr/>
-          <p:nvPr/>
-        </p:nvSpPr>
-        <p:spPr>
-          <a:xfrm>
-            <a:off x="2999232" y="3364992"/>
+          <p:cNvPr id="30" name="Text 28"/>
+          <p:cNvSpPr/>
+          <p:nvPr/>
+        </p:nvSpPr>
+        <p:spPr>
+          <a:xfrm>
+            <a:off x="2313432" y="3364992"/>
             <a:ext cx="1645920" cy="475488"/>
           </a:xfrm>
           <a:prstGeom prst="rect">
@@ -21127,14 +21778,14 @@
       </p:sp>
       <p:sp>
         <p:nvSpPr>
-          <p:cNvPr id="27" name="Text 25"/>
-          <p:cNvSpPr/>
-          <p:nvPr/>
-        </p:nvSpPr>
-        <p:spPr>
-          <a:xfrm>
-            <a:off x="4645152" y="3364992"/>
-            <a:ext cx="1097280" cy="475488"/>
+          <p:cNvPr id="31" name="Text 29"/>
+          <p:cNvSpPr/>
+          <p:nvPr/>
+        </p:nvSpPr>
+        <p:spPr>
+          <a:xfrm>
+            <a:off x="3959352" y="3364992"/>
+            <a:ext cx="411480" cy="475488"/>
           </a:xfrm>
           <a:prstGeom prst="rect">
             <a:avLst/>
@@ -21166,13 +21817,13 @@
       </p:sp>
       <p:sp>
         <p:nvSpPr>
-          <p:cNvPr id="28" name="Shape 26"/>
-          <p:cNvSpPr/>
-          <p:nvPr/>
-        </p:nvSpPr>
-        <p:spPr>
-          <a:xfrm>
-            <a:off x="5742432" y="3364992"/>
+          <p:cNvPr id="32" name="Shape 30"/>
+          <p:cNvSpPr/>
+          <p:nvPr/>
+        </p:nvSpPr>
+        <p:spPr>
+          <a:xfrm>
+            <a:off x="4370832" y="3364992"/>
             <a:ext cx="1645920" cy="475488"/>
           </a:xfrm>
           <a:prstGeom prst="rect">
@@ -21193,13 +21844,13 @@
       </p:sp>
       <p:sp>
         <p:nvSpPr>
-          <p:cNvPr id="29" name="Text 27"/>
-          <p:cNvSpPr/>
-          <p:nvPr/>
-        </p:nvSpPr>
-        <p:spPr>
-          <a:xfrm>
-            <a:off x="5742432" y="3364992"/>
+          <p:cNvPr id="33" name="Text 31"/>
+          <p:cNvSpPr/>
+          <p:nvPr/>
+        </p:nvSpPr>
+        <p:spPr>
+          <a:xfrm>
+            <a:off x="4370832" y="3364992"/>
             <a:ext cx="1645920" cy="475488"/>
           </a:xfrm>
           <a:prstGeom prst="rect">
@@ -21224,7 +21875,7 @@
                 <a:ea typeface="Trebuchet MS" pitchFamily="34" charset="-122"/>
                 <a:cs typeface="Trebuchet MS" pitchFamily="34" charset="-120"/>
               </a:rPr>
-              <a:t>have</a:t>
+              <a:t>lov</a:t>
             </a:r>
             <a:endParaRPr lang="en-US" sz="1400" dirty="0"/>
           </a:p>
@@ -21232,7 +21883,112 @@
       </p:sp>
       <p:sp>
         <p:nvSpPr>
-          <p:cNvPr id="30" name="Shape 28"/>
+          <p:cNvPr id="34" name="Text 32"/>
+          <p:cNvSpPr/>
+          <p:nvPr/>
+        </p:nvSpPr>
+        <p:spPr>
+          <a:xfrm>
+            <a:off x="6016752" y="3364992"/>
+            <a:ext cx="411480" cy="475488"/>
+          </a:xfrm>
+          <a:prstGeom prst="rect">
+            <a:avLst/>
+          </a:prstGeom>
+          <a:noFill/>
+          <a:ln/>
+        </p:spPr>
+        <p:txBody>
+          <a:bodyPr wrap="square" lIns="0" tIns="0" rIns="0" bIns="0" rtlCol="0" anchor="ctr"/>
+          <a:lstStyle/>
+          <a:p>
+            <a:pPr algn="ctr" indent="0" marL="0">
+              <a:buNone/>
+            </a:pPr>
+            <a:r>
+              <a:rPr lang="en-US" sz="1600" b="1" dirty="0">
+                <a:solidFill>
+                  <a:srgbClr val="0D9488"/>
+                </a:solidFill>
+                <a:latin typeface="Trebuchet MS" pitchFamily="34" charset="0"/>
+                <a:ea typeface="Trebuchet MS" pitchFamily="34" charset="-122"/>
+                <a:cs typeface="Trebuchet MS" pitchFamily="34" charset="-120"/>
+              </a:rPr>
+              <a:t>·</a:t>
+            </a:r>
+            <a:endParaRPr lang="en-US" sz="1600" dirty="0"/>
+          </a:p>
+        </p:txBody>
+      </p:sp>
+      <p:sp>
+        <p:nvSpPr>
+          <p:cNvPr id="35" name="Shape 33"/>
+          <p:cNvSpPr/>
+          <p:nvPr/>
+        </p:nvSpPr>
+        <p:spPr>
+          <a:xfrm>
+            <a:off x="6428232" y="3364992"/>
+            <a:ext cx="1645920" cy="475488"/>
+          </a:xfrm>
+          <a:prstGeom prst="rect">
+            <a:avLst>
+              <a:gd name="adj" fmla="val 9615"/>
+            </a:avLst>
+          </a:prstGeom>
+          <a:solidFill>
+            <a:srgbClr val="FFFFFF"/>
+          </a:solidFill>
+          <a:ln w="12700">
+            <a:solidFill>
+              <a:srgbClr val="0D9488"/>
+            </a:solidFill>
+            <a:prstDash val="solid"/>
+          </a:ln>
+        </p:spPr>
+      </p:sp>
+      <p:sp>
+        <p:nvSpPr>
+          <p:cNvPr id="36" name="Text 34"/>
+          <p:cNvSpPr/>
+          <p:nvPr/>
+        </p:nvSpPr>
+        <p:spPr>
+          <a:xfrm>
+            <a:off x="6428232" y="3364992"/>
+            <a:ext cx="1645920" cy="475488"/>
+          </a:xfrm>
+          <a:prstGeom prst="rect">
+            <a:avLst/>
+          </a:prstGeom>
+          <a:noFill/>
+          <a:ln/>
+        </p:spPr>
+        <p:txBody>
+          <a:bodyPr wrap="square" lIns="0" tIns="0" rIns="0" bIns="0" rtlCol="0" anchor="ctr"/>
+          <a:lstStyle/>
+          <a:p>
+            <a:pPr algn="ctr" indent="0" marL="0">
+              <a:buNone/>
+            </a:pPr>
+            <a:r>
+              <a:rPr lang="en-US" sz="1400" b="1" dirty="0">
+                <a:solidFill>
+                  <a:srgbClr val="0D9488"/>
+                </a:solidFill>
+                <a:latin typeface="Trebuchet MS" pitchFamily="34" charset="0"/>
+                <a:ea typeface="Trebuchet MS" pitchFamily="34" charset="-122"/>
+                <a:cs typeface="Trebuchet MS" pitchFamily="34" charset="-120"/>
+              </a:rPr>
+              <a:t>ed</a:t>
+            </a:r>
+            <a:endParaRPr lang="en-US" sz="1400" dirty="0"/>
+          </a:p>
+        </p:txBody>
+      </p:sp>
+      <p:sp>
+        <p:nvSpPr>
+          <p:cNvPr id="37" name="Shape 35"/>
           <p:cNvSpPr/>
           <p:nvPr/>
         </p:nvSpPr>
@@ -21259,7 +22015,7 @@
       </p:sp>
       <p:sp>
         <p:nvSpPr>
-          <p:cNvPr id="31" name="Text 29"/>
+          <p:cNvPr id="38" name="Text 36"/>
           <p:cNvSpPr/>
           <p:nvPr/>
         </p:nvSpPr>
@@ -21298,18 +22054,18 @@
       </p:sp>
       <p:sp>
         <p:nvSpPr>
-          <p:cNvPr id="32" name="Shape 30"/>
+          <p:cNvPr id="39" name="Shape 37"/>
           <p:cNvSpPr/>
           <p:nvPr/>
         </p:nvSpPr>
         <p:spPr>
           <a:xfrm>
             <a:off x="1874520" y="4096512"/>
-            <a:ext cx="6903720" cy="804672"/>
+            <a:ext cx="6903720" cy="658368"/>
           </a:xfrm>
           <a:prstGeom prst="rect">
             <a:avLst>
-              <a:gd name="adj" fmla="val 6818"/>
+              <a:gd name="adj" fmla="val 8333"/>
             </a:avLst>
           </a:prstGeom>
           <a:solidFill>
@@ -21325,18 +22081,18 @@
       </p:sp>
       <p:sp>
         <p:nvSpPr>
-          <p:cNvPr id="33" name="Shape 31"/>
-          <p:cNvSpPr/>
-          <p:nvPr/>
-        </p:nvSpPr>
-        <p:spPr>
-          <a:xfrm>
-            <a:off x="2427732" y="4169664"/>
-            <a:ext cx="685800" cy="384048"/>
+          <p:cNvPr id="40" name="Shape 38"/>
+          <p:cNvSpPr/>
+          <p:nvPr/>
+        </p:nvSpPr>
+        <p:spPr>
+          <a:xfrm>
+            <a:off x="2124837" y="4169664"/>
+            <a:ext cx="685800" cy="475488"/>
           </a:xfrm>
           <a:prstGeom prst="rect">
             <a:avLst>
-              <a:gd name="adj" fmla="val 9524"/>
+              <a:gd name="adj" fmla="val 7692"/>
             </a:avLst>
           </a:prstGeom>
           <a:solidFill>
@@ -21352,14 +22108,14 @@
       </p:sp>
       <p:sp>
         <p:nvSpPr>
-          <p:cNvPr id="34" name="Text 32"/>
-          <p:cNvSpPr/>
-          <p:nvPr/>
-        </p:nvSpPr>
-        <p:spPr>
-          <a:xfrm>
-            <a:off x="2427732" y="4169664"/>
-            <a:ext cx="685800" cy="384048"/>
+          <p:cNvPr id="41" name="Text 39"/>
+          <p:cNvSpPr/>
+          <p:nvPr/>
+        </p:nvSpPr>
+        <p:spPr>
+          <a:xfrm>
+            <a:off x="2124837" y="4169664"/>
+            <a:ext cx="685800" cy="475488"/>
           </a:xfrm>
           <a:prstGeom prst="rect">
             <a:avLst/>
@@ -21391,18 +22147,18 @@
       </p:sp>
       <p:sp>
         <p:nvSpPr>
-          <p:cNvPr id="35" name="Shape 33"/>
-          <p:cNvSpPr/>
-          <p:nvPr/>
-        </p:nvSpPr>
-        <p:spPr>
-          <a:xfrm>
-            <a:off x="3639312" y="4169664"/>
-            <a:ext cx="685800" cy="384048"/>
+          <p:cNvPr id="42" name="Shape 40"/>
+          <p:cNvSpPr/>
+          <p:nvPr/>
+        </p:nvSpPr>
+        <p:spPr>
+          <a:xfrm>
+            <a:off x="3033522" y="4169664"/>
+            <a:ext cx="685800" cy="475488"/>
           </a:xfrm>
           <a:prstGeom prst="rect">
             <a:avLst>
-              <a:gd name="adj" fmla="val 9524"/>
+              <a:gd name="adj" fmla="val 7692"/>
             </a:avLst>
           </a:prstGeom>
           <a:solidFill>
@@ -21418,14 +22174,14 @@
       </p:sp>
       <p:sp>
         <p:nvSpPr>
-          <p:cNvPr id="36" name="Text 34"/>
-          <p:cNvSpPr/>
-          <p:nvPr/>
-        </p:nvSpPr>
-        <p:spPr>
-          <a:xfrm>
-            <a:off x="3639312" y="4169664"/>
-            <a:ext cx="685800" cy="384048"/>
+          <p:cNvPr id="43" name="Text 41"/>
+          <p:cNvSpPr/>
+          <p:nvPr/>
+        </p:nvSpPr>
+        <p:spPr>
+          <a:xfrm>
+            <a:off x="3033522" y="4169664"/>
+            <a:ext cx="685800" cy="475488"/>
           </a:xfrm>
           <a:prstGeom prst="rect">
             <a:avLst/>
@@ -21457,18 +22213,18 @@
       </p:sp>
       <p:sp>
         <p:nvSpPr>
-          <p:cNvPr id="37" name="Shape 35"/>
-          <p:cNvSpPr/>
-          <p:nvPr/>
-        </p:nvSpPr>
-        <p:spPr>
-          <a:xfrm>
-            <a:off x="4850892" y="4169664"/>
-            <a:ext cx="685800" cy="384048"/>
+          <p:cNvPr id="44" name="Shape 42"/>
+          <p:cNvSpPr/>
+          <p:nvPr/>
+        </p:nvSpPr>
+        <p:spPr>
+          <a:xfrm>
+            <a:off x="3942207" y="4169664"/>
+            <a:ext cx="685800" cy="475488"/>
           </a:xfrm>
           <a:prstGeom prst="rect">
             <a:avLst>
-              <a:gd name="adj" fmla="val 9524"/>
+              <a:gd name="adj" fmla="val 7692"/>
             </a:avLst>
           </a:prstGeom>
           <a:solidFill>
@@ -21484,14 +22240,14 @@
       </p:sp>
       <p:sp>
         <p:nvSpPr>
-          <p:cNvPr id="38" name="Text 36"/>
-          <p:cNvSpPr/>
-          <p:nvPr/>
-        </p:nvSpPr>
-        <p:spPr>
-          <a:xfrm>
-            <a:off x="4850892" y="4169664"/>
-            <a:ext cx="685800" cy="384048"/>
+          <p:cNvPr id="45" name="Text 43"/>
+          <p:cNvSpPr/>
+          <p:nvPr/>
+        </p:nvSpPr>
+        <p:spPr>
+          <a:xfrm>
+            <a:off x="3942207" y="4169664"/>
+            <a:ext cx="685800" cy="475488"/>
           </a:xfrm>
           <a:prstGeom prst="rect">
             <a:avLst/>
@@ -21515,7 +22271,7 @@
                 <a:ea typeface="Trebuchet MS" pitchFamily="34" charset="-122"/>
                 <a:cs typeface="Trebuchet MS" pitchFamily="34" charset="-120"/>
               </a:rPr>
-              <a:t>h</a:t>
+              <a:t>l</a:t>
             </a:r>
             <a:endParaRPr lang="en-US" sz="900" dirty="0"/>
           </a:p>
@@ -21523,18 +22279,18 @@
       </p:sp>
       <p:sp>
         <p:nvSpPr>
-          <p:cNvPr id="39" name="Shape 37"/>
-          <p:cNvSpPr/>
-          <p:nvPr/>
-        </p:nvSpPr>
-        <p:spPr>
-          <a:xfrm>
-            <a:off x="6062472" y="4169664"/>
-            <a:ext cx="685800" cy="384048"/>
+          <p:cNvPr id="46" name="Shape 44"/>
+          <p:cNvSpPr/>
+          <p:nvPr/>
+        </p:nvSpPr>
+        <p:spPr>
+          <a:xfrm>
+            <a:off x="4850892" y="4169664"/>
+            <a:ext cx="685800" cy="475488"/>
           </a:xfrm>
           <a:prstGeom prst="rect">
             <a:avLst>
-              <a:gd name="adj" fmla="val 9524"/>
+              <a:gd name="adj" fmla="val 7692"/>
             </a:avLst>
           </a:prstGeom>
           <a:solidFill>
@@ -21550,14 +22306,14 @@
       </p:sp>
       <p:sp>
         <p:nvSpPr>
-          <p:cNvPr id="40" name="Text 38"/>
-          <p:cNvSpPr/>
-          <p:nvPr/>
-        </p:nvSpPr>
-        <p:spPr>
-          <a:xfrm>
-            <a:off x="6062472" y="4169664"/>
-            <a:ext cx="685800" cy="384048"/>
+          <p:cNvPr id="47" name="Text 45"/>
+          <p:cNvSpPr/>
+          <p:nvPr/>
+        </p:nvSpPr>
+        <p:spPr>
+          <a:xfrm>
+            <a:off x="4850892" y="4169664"/>
+            <a:ext cx="685800" cy="475488"/>
           </a:xfrm>
           <a:prstGeom prst="rect">
             <a:avLst/>
@@ -21581,7 +22337,7 @@
                 <a:ea typeface="Trebuchet MS" pitchFamily="34" charset="-122"/>
                 <a:cs typeface="Trebuchet MS" pitchFamily="34" charset="-120"/>
               </a:rPr>
-              <a:t>a</a:t>
+              <a:t>o</a:t>
             </a:r>
             <a:endParaRPr lang="en-US" sz="900" dirty="0"/>
           </a:p>
@@ -21589,18 +22345,18 @@
       </p:sp>
       <p:sp>
         <p:nvSpPr>
-          <p:cNvPr id="41" name="Shape 39"/>
-          <p:cNvSpPr/>
-          <p:nvPr/>
-        </p:nvSpPr>
-        <p:spPr>
-          <a:xfrm>
-            <a:off x="7274052" y="4169664"/>
-            <a:ext cx="685800" cy="384048"/>
+          <p:cNvPr id="48" name="Shape 46"/>
+          <p:cNvSpPr/>
+          <p:nvPr/>
+        </p:nvSpPr>
+        <p:spPr>
+          <a:xfrm>
+            <a:off x="5759577" y="4169664"/>
+            <a:ext cx="685800" cy="475488"/>
           </a:xfrm>
           <a:prstGeom prst="rect">
             <a:avLst>
-              <a:gd name="adj" fmla="val 9524"/>
+              <a:gd name="adj" fmla="val 7692"/>
             </a:avLst>
           </a:prstGeom>
           <a:solidFill>
@@ -21616,14 +22372,14 @@
       </p:sp>
       <p:sp>
         <p:nvSpPr>
-          <p:cNvPr id="42" name="Text 40"/>
-          <p:cNvSpPr/>
-          <p:nvPr/>
-        </p:nvSpPr>
-        <p:spPr>
-          <a:xfrm>
-            <a:off x="7274052" y="4169664"/>
-            <a:ext cx="685800" cy="384048"/>
+          <p:cNvPr id="49" name="Text 47"/>
+          <p:cNvSpPr/>
+          <p:nvPr/>
+        </p:nvSpPr>
+        <p:spPr>
+          <a:xfrm>
+            <a:off x="5759577" y="4169664"/>
+            <a:ext cx="685800" cy="475488"/>
           </a:xfrm>
           <a:prstGeom prst="rect">
             <a:avLst/>
@@ -21647,7 +22403,7 @@
                 <a:ea typeface="Trebuchet MS" pitchFamily="34" charset="-122"/>
                 <a:cs typeface="Trebuchet MS" pitchFamily="34" charset="-120"/>
               </a:rPr>
-              <a:t>ve</a:t>
+              <a:t>v</a:t>
             </a:r>
             <a:endParaRPr lang="en-US" sz="900" dirty="0"/>
           </a:p>
@@ -21655,40 +22411,133 @@
       </p:sp>
       <p:sp>
         <p:nvSpPr>
-          <p:cNvPr id="43" name="Text 41"/>
-          <p:cNvSpPr/>
-          <p:nvPr/>
-        </p:nvSpPr>
-        <p:spPr>
-          <a:xfrm>
-            <a:off x="7274052" y="4572000"/>
-            <a:ext cx="685800" cy="219456"/>
-          </a:xfrm>
-          <a:prstGeom prst="rect">
-            <a:avLst/>
-          </a:prstGeom>
-          <a:noFill/>
-          <a:ln/>
-        </p:spPr>
-        <p:txBody>
-          <a:bodyPr wrap="square" lIns="0" tIns="0" rIns="0" bIns="0" rtlCol="0" anchor="t"/>
-          <a:lstStyle/>
-          <a:p>
-            <a:pPr algn="ctr" indent="0" marL="0">
-              <a:buNone/>
-            </a:pPr>
-            <a:r>
-              <a:rPr lang="en-US" sz="750" i="1" dirty="0">
-                <a:solidFill>
-                  <a:srgbClr val="94A3B8"/>
-                </a:solidFill>
-                <a:latin typeface="Calibri" pitchFamily="34" charset="0"/>
-                <a:ea typeface="Calibri" pitchFamily="34" charset="-122"/>
-                <a:cs typeface="Calibri" pitchFamily="34" charset="-120"/>
-              </a:rPr>
-              <a:t>/v/</a:t>
-            </a:r>
-            <a:endParaRPr lang="en-US" sz="750" dirty="0"/>
+          <p:cNvPr id="50" name="Shape 48"/>
+          <p:cNvSpPr/>
+          <p:nvPr/>
+        </p:nvSpPr>
+        <p:spPr>
+          <a:xfrm>
+            <a:off x="6668262" y="4169664"/>
+            <a:ext cx="685800" cy="475488"/>
+          </a:xfrm>
+          <a:prstGeom prst="rect">
+            <a:avLst>
+              <a:gd name="adj" fmla="val 7692"/>
+            </a:avLst>
+          </a:prstGeom>
+          <a:solidFill>
+            <a:srgbClr val="FFFFFF"/>
+          </a:solidFill>
+          <a:ln w="12700">
+            <a:solidFill>
+              <a:srgbClr val="DB2777"/>
+            </a:solidFill>
+            <a:prstDash val="solid"/>
+          </a:ln>
+        </p:spPr>
+      </p:sp>
+      <p:sp>
+        <p:nvSpPr>
+          <p:cNvPr id="51" name="Text 49"/>
+          <p:cNvSpPr/>
+          <p:nvPr/>
+        </p:nvSpPr>
+        <p:spPr>
+          <a:xfrm>
+            <a:off x="6668262" y="4169664"/>
+            <a:ext cx="685800" cy="475488"/>
+          </a:xfrm>
+          <a:prstGeom prst="rect">
+            <a:avLst/>
+          </a:prstGeom>
+          <a:noFill/>
+          <a:ln/>
+        </p:spPr>
+        <p:txBody>
+          <a:bodyPr wrap="square" lIns="0" tIns="0" rIns="0" bIns="0" rtlCol="0" anchor="ctr"/>
+          <a:lstStyle/>
+          <a:p>
+            <a:pPr algn="ctr" indent="0" marL="0">
+              <a:buNone/>
+            </a:pPr>
+            <a:r>
+              <a:rPr lang="en-US" sz="900" b="1" dirty="0">
+                <a:solidFill>
+                  <a:srgbClr val="9D174D"/>
+                </a:solidFill>
+                <a:latin typeface="Trebuchet MS" pitchFamily="34" charset="0"/>
+                <a:ea typeface="Trebuchet MS" pitchFamily="34" charset="-122"/>
+                <a:cs typeface="Trebuchet MS" pitchFamily="34" charset="-120"/>
+              </a:rPr>
+              <a:t>e</a:t>
+            </a:r>
+            <a:endParaRPr lang="en-US" sz="900" dirty="0"/>
+          </a:p>
+        </p:txBody>
+      </p:sp>
+      <p:sp>
+        <p:nvSpPr>
+          <p:cNvPr id="52" name="Shape 50"/>
+          <p:cNvSpPr/>
+          <p:nvPr/>
+        </p:nvSpPr>
+        <p:spPr>
+          <a:xfrm>
+            <a:off x="7576947" y="4169664"/>
+            <a:ext cx="685800" cy="475488"/>
+          </a:xfrm>
+          <a:prstGeom prst="rect">
+            <a:avLst>
+              <a:gd name="adj" fmla="val 7692"/>
+            </a:avLst>
+          </a:prstGeom>
+          <a:solidFill>
+            <a:srgbClr val="FFFFFF"/>
+          </a:solidFill>
+          <a:ln w="12700">
+            <a:solidFill>
+              <a:srgbClr val="DB2777"/>
+            </a:solidFill>
+            <a:prstDash val="solid"/>
+          </a:ln>
+        </p:spPr>
+      </p:sp>
+      <p:sp>
+        <p:nvSpPr>
+          <p:cNvPr id="53" name="Text 51"/>
+          <p:cNvSpPr/>
+          <p:nvPr/>
+        </p:nvSpPr>
+        <p:spPr>
+          <a:xfrm>
+            <a:off x="7576947" y="4169664"/>
+            <a:ext cx="685800" cy="475488"/>
+          </a:xfrm>
+          <a:prstGeom prst="rect">
+            <a:avLst/>
+          </a:prstGeom>
+          <a:noFill/>
+          <a:ln/>
+        </p:spPr>
+        <p:txBody>
+          <a:bodyPr wrap="square" lIns="0" tIns="0" rIns="0" bIns="0" rtlCol="0" anchor="ctr"/>
+          <a:lstStyle/>
+          <a:p>
+            <a:pPr algn="ctr" indent="0" marL="0">
+              <a:buNone/>
+            </a:pPr>
+            <a:r>
+              <a:rPr lang="en-US" sz="900" b="1" dirty="0">
+                <a:solidFill>
+                  <a:srgbClr val="9D174D"/>
+                </a:solidFill>
+                <a:latin typeface="Trebuchet MS" pitchFamily="34" charset="0"/>
+                <a:ea typeface="Trebuchet MS" pitchFamily="34" charset="-122"/>
+                <a:cs typeface="Trebuchet MS" pitchFamily="34" charset="-120"/>
+              </a:rPr>
+              <a:t>d</a:t>
+            </a:r>
+            <a:endParaRPr lang="en-US" sz="900" dirty="0"/>
           </a:p>
         </p:txBody>
       </p:sp>
@@ -21978,7 +22827,7 @@
                 <a:ea typeface="Calibri" pitchFamily="34" charset="-122"/>
                 <a:cs typeface="Calibri" pitchFamily="34" charset="-120"/>
               </a:rPr>
-              <a:t>Word Labs  •  wordlabs.app  •  Prefix: 'be-' = make, cause, around, thoroughly</a:t>
+              <a:t>Word Labs  •  wordlabs.app  •  Prefix: 'be-' = make, cause, or thoroughly</a:t>
             </a:r>
             <a:endParaRPr lang="en-US" sz="800" dirty="0"/>
           </a:p>
@@ -22117,7 +22966,7 @@
                 <a:ea typeface="Trebuchet MS" pitchFamily="34" charset="-122"/>
                 <a:cs typeface="Trebuchet MS" pitchFamily="34" charset="-120"/>
               </a:rPr>
-              <a:t>believe</a:t>
+              <a:t>behave</a:t>
             </a:r>
             <a:endParaRPr lang="en-US" sz="2800" dirty="0"/>
           </a:p>
@@ -22805,7 +23654,7 @@
                 <a:ea typeface="Calibri" pitchFamily="34" charset="-122"/>
                 <a:cs typeface="Calibri" pitchFamily="34" charset="-120"/>
               </a:rPr>
-              <a:t>Word Labs  •  wordlabs.app  •  Prefix: 'be-' = make, cause, around, thoroughly</a:t>
+              <a:t>Word Labs  •  wordlabs.app  •  Prefix: 'be-' = make, cause, or thoroughly</a:t>
             </a:r>
             <a:endParaRPr lang="en-US" sz="800" dirty="0"/>
           </a:p>
@@ -22944,7 +23793,7 @@
                 <a:ea typeface="Trebuchet MS" pitchFamily="34" charset="-122"/>
                 <a:cs typeface="Trebuchet MS" pitchFamily="34" charset="-120"/>
               </a:rPr>
-              <a:t>believe</a:t>
+              <a:t>behave</a:t>
             </a:r>
             <a:endParaRPr lang="en-US" sz="2800" dirty="0"/>
           </a:p>
@@ -23122,7 +23971,7 @@
                 <a:ea typeface="Calibri" pitchFamily="34" charset="-122"/>
                 <a:cs typeface="Calibri" pitchFamily="34" charset="-120"/>
               </a:rPr>
-              <a:t>thoroughly, cause</a:t>
+              <a:t>thoroughly or completely</a:t>
             </a:r>
             <a:endParaRPr lang="en-US" sz="850" dirty="0"/>
           </a:p>
@@ -23195,7 +24044,7 @@
                 <a:ea typeface="Trebuchet MS" pitchFamily="34" charset="-122"/>
                 <a:cs typeface="Trebuchet MS" pitchFamily="34" charset="-120"/>
               </a:rPr>
-              <a:t>lieve</a:t>
+              <a:t>have</a:t>
             </a:r>
             <a:endParaRPr lang="en-US" sz="1300" dirty="0"/>
           </a:p>
@@ -23234,7 +24083,7 @@
                 <a:ea typeface="Calibri" pitchFamily="34" charset="-122"/>
                 <a:cs typeface="Calibri" pitchFamily="34" charset="-120"/>
               </a:rPr>
-              <a:t>trust, hold dear</a:t>
+              <a:t>to hold or conduct oneself</a:t>
             </a:r>
             <a:endParaRPr lang="en-US" sz="850" dirty="0"/>
           </a:p>
@@ -23790,7 +24639,7 @@
                 <a:ea typeface="Calibri" pitchFamily="34" charset="-122"/>
                 <a:cs typeface="Calibri" pitchFamily="34" charset="-120"/>
               </a:rPr>
-              <a:t>Word Labs  •  wordlabs.app  •  Prefix: 'be-' = make, cause, around, thoroughly</a:t>
+              <a:t>Word Labs  •  wordlabs.app  •  Prefix: 'be-' = make, cause, or thoroughly</a:t>
             </a:r>
             <a:endParaRPr lang="en-US" sz="800" dirty="0"/>
           </a:p>
@@ -23863,7 +24712,7 @@
                 <a:ea typeface="Trebuchet MS" pitchFamily="34" charset="-122"/>
                 <a:cs typeface="Trebuchet MS" pitchFamily="34" charset="-120"/>
               </a:rPr>
-              <a:t>We are learning that the prefix 'be-' means 'make, cause, around, thoroughly'.</a:t>
+              <a:t>We are learning that the prefix 'be-' means 'make, cause, or thoroughly'.</a:t>
             </a:r>
             <a:endParaRPr lang="en-US" sz="2000" dirty="0"/>
           </a:p>
@@ -24509,7 +25358,7 @@
                 <a:ea typeface="Calibri" pitchFamily="34" charset="-122"/>
                 <a:cs typeface="Calibri" pitchFamily="34" charset="-120"/>
               </a:rPr>
-              <a:t>Word Labs  •  wordlabs.app  •  Prefix: 'be-' = make, cause, around, thoroughly</a:t>
+              <a:t>Word Labs  •  wordlabs.app  •  Prefix: 'be-' = make, cause, or thoroughly</a:t>
             </a:r>
             <a:endParaRPr lang="en-US" sz="800" dirty="0"/>
           </a:p>
@@ -24648,7 +25497,7 @@
                 <a:ea typeface="Trebuchet MS" pitchFamily="34" charset="-122"/>
                 <a:cs typeface="Trebuchet MS" pitchFamily="34" charset="-120"/>
               </a:rPr>
-              <a:t>believe</a:t>
+              <a:t>behave</a:t>
             </a:r>
             <a:endParaRPr lang="en-US" sz="2800" dirty="0"/>
           </a:p>
@@ -24826,7 +25675,7 @@
                 <a:ea typeface="Calibri" pitchFamily="34" charset="-122"/>
                 <a:cs typeface="Calibri" pitchFamily="34" charset="-120"/>
               </a:rPr>
-              <a:t>thoroughly, cause</a:t>
+              <a:t>thoroughly or completely</a:t>
             </a:r>
             <a:endParaRPr lang="en-US" sz="850" dirty="0"/>
           </a:p>
@@ -24899,7 +25748,7 @@
                 <a:ea typeface="Trebuchet MS" pitchFamily="34" charset="-122"/>
                 <a:cs typeface="Trebuchet MS" pitchFamily="34" charset="-120"/>
               </a:rPr>
-              <a:t>lieve</a:t>
+              <a:t>have</a:t>
             </a:r>
             <a:endParaRPr lang="en-US" sz="1300" dirty="0"/>
           </a:p>
@@ -24938,7 +25787,7 @@
                 <a:ea typeface="Calibri" pitchFamily="34" charset="-122"/>
                 <a:cs typeface="Calibri" pitchFamily="34" charset="-120"/>
               </a:rPr>
-              <a:t>trust, hold dear</a:t>
+              <a:t>to hold or conduct oneself</a:t>
             </a:r>
             <a:endParaRPr lang="en-US" sz="850" dirty="0"/>
           </a:p>
@@ -25202,7 +26051,7 @@
                 <a:ea typeface="Trebuchet MS" pitchFamily="34" charset="-122"/>
                 <a:cs typeface="Trebuchet MS" pitchFamily="34" charset="-120"/>
               </a:rPr>
-              <a:t>lieve</a:t>
+              <a:t>have</a:t>
             </a:r>
             <a:endParaRPr lang="en-US" sz="1400" dirty="0"/>
           </a:p>
@@ -25626,7 +26475,7 @@
                 <a:ea typeface="Calibri" pitchFamily="34" charset="-122"/>
                 <a:cs typeface="Calibri" pitchFamily="34" charset="-120"/>
               </a:rPr>
-              <a:t>Word Labs  •  wordlabs.app  •  Prefix: 'be-' = make, cause, around, thoroughly</a:t>
+              <a:t>Word Labs  •  wordlabs.app  •  Prefix: 'be-' = make, cause, or thoroughly</a:t>
             </a:r>
             <a:endParaRPr lang="en-US" sz="800" dirty="0"/>
           </a:p>
@@ -25765,7 +26614,7 @@
                 <a:ea typeface="Trebuchet MS" pitchFamily="34" charset="-122"/>
                 <a:cs typeface="Trebuchet MS" pitchFamily="34" charset="-120"/>
               </a:rPr>
-              <a:t>believe</a:t>
+              <a:t>behave</a:t>
             </a:r>
             <a:endParaRPr lang="en-US" sz="2800" dirty="0"/>
           </a:p>
@@ -25943,7 +26792,7 @@
                 <a:ea typeface="Calibri" pitchFamily="34" charset="-122"/>
                 <a:cs typeface="Calibri" pitchFamily="34" charset="-120"/>
               </a:rPr>
-              <a:t>thoroughly, cause</a:t>
+              <a:t>thoroughly or completely</a:t>
             </a:r>
             <a:endParaRPr lang="en-US" sz="850" dirty="0"/>
           </a:p>
@@ -26016,7 +26865,7 @@
                 <a:ea typeface="Trebuchet MS" pitchFamily="34" charset="-122"/>
                 <a:cs typeface="Trebuchet MS" pitchFamily="34" charset="-120"/>
               </a:rPr>
-              <a:t>lieve</a:t>
+              <a:t>have</a:t>
             </a:r>
             <a:endParaRPr lang="en-US" sz="1300" dirty="0"/>
           </a:p>
@@ -26055,7 +26904,7 @@
                 <a:ea typeface="Calibri" pitchFamily="34" charset="-122"/>
                 <a:cs typeface="Calibri" pitchFamily="34" charset="-120"/>
               </a:rPr>
-              <a:t>trust, hold dear</a:t>
+              <a:t>to hold or conduct oneself</a:t>
             </a:r>
             <a:endParaRPr lang="en-US" sz="850" dirty="0"/>
           </a:p>
@@ -26319,7 +27168,7 @@
                 <a:ea typeface="Trebuchet MS" pitchFamily="34" charset="-122"/>
                 <a:cs typeface="Trebuchet MS" pitchFamily="34" charset="-120"/>
               </a:rPr>
-              <a:t>lieve</a:t>
+              <a:t>have</a:t>
             </a:r>
             <a:endParaRPr lang="en-US" sz="1400" dirty="0"/>
           </a:p>
@@ -26610,7 +27459,7 @@
                 <a:ea typeface="Trebuchet MS" pitchFamily="34" charset="-122"/>
                 <a:cs typeface="Trebuchet MS" pitchFamily="34" charset="-120"/>
               </a:rPr>
-              <a:t>l</a:t>
+              <a:t>h</a:t>
             </a:r>
             <a:endParaRPr lang="en-US" sz="900" dirty="0"/>
           </a:p>
@@ -26676,7 +27525,7 @@
                 <a:ea typeface="Trebuchet MS" pitchFamily="34" charset="-122"/>
                 <a:cs typeface="Trebuchet MS" pitchFamily="34" charset="-120"/>
               </a:rPr>
-              <a:t>ie</a:t>
+              <a:t>a</a:t>
             </a:r>
             <a:endParaRPr lang="en-US" sz="900" dirty="0"/>
           </a:p>
@@ -26684,46 +27533,7 @@
       </p:sp>
       <p:sp>
         <p:nvSpPr>
-          <p:cNvPr id="41" name="Text 39"/>
-          <p:cNvSpPr/>
-          <p:nvPr/>
-        </p:nvSpPr>
-        <p:spPr>
-          <a:xfrm>
-            <a:off x="6062472" y="4572000"/>
-            <a:ext cx="685800" cy="219456"/>
-          </a:xfrm>
-          <a:prstGeom prst="rect">
-            <a:avLst/>
-          </a:prstGeom>
-          <a:noFill/>
-          <a:ln/>
-        </p:spPr>
-        <p:txBody>
-          <a:bodyPr wrap="square" lIns="0" tIns="0" rIns="0" bIns="0" rtlCol="0" anchor="t"/>
-          <a:lstStyle/>
-          <a:p>
-            <a:pPr algn="ctr" indent="0" marL="0">
-              <a:buNone/>
-            </a:pPr>
-            <a:r>
-              <a:rPr lang="en-US" sz="750" i="1" dirty="0">
-                <a:solidFill>
-                  <a:srgbClr val="94A3B8"/>
-                </a:solidFill>
-                <a:latin typeface="Calibri" pitchFamily="34" charset="0"/>
-                <a:ea typeface="Calibri" pitchFamily="34" charset="-122"/>
-                <a:cs typeface="Calibri" pitchFamily="34" charset="-120"/>
-              </a:rPr>
-              <a:t>/ee/</a:t>
-            </a:r>
-            <a:endParaRPr lang="en-US" sz="750" dirty="0"/>
-          </a:p>
-        </p:txBody>
-      </p:sp>
-      <p:sp>
-        <p:nvSpPr>
-          <p:cNvPr id="42" name="Shape 40"/>
+          <p:cNvPr id="41" name="Shape 39"/>
           <p:cNvSpPr/>
           <p:nvPr/>
         </p:nvSpPr>
@@ -26750,7 +27560,7 @@
       </p:sp>
       <p:sp>
         <p:nvSpPr>
-          <p:cNvPr id="43" name="Text 41"/>
+          <p:cNvPr id="42" name="Text 40"/>
           <p:cNvSpPr/>
           <p:nvPr/>
         </p:nvSpPr>
@@ -26789,7 +27599,7 @@
       </p:sp>
       <p:sp>
         <p:nvSpPr>
-          <p:cNvPr id="44" name="Text 42"/>
+          <p:cNvPr id="43" name="Text 41"/>
           <p:cNvSpPr/>
           <p:nvPr/>
         </p:nvSpPr>
@@ -27112,7 +27922,7 @@
                 <a:ea typeface="Calibri" pitchFamily="34" charset="-122"/>
                 <a:cs typeface="Calibri" pitchFamily="34" charset="-120"/>
               </a:rPr>
-              <a:t>Word Labs  •  wordlabs.app  •  Prefix: 'be-' = make, cause, around, thoroughly</a:t>
+              <a:t>Word Labs  •  wordlabs.app  •  Prefix: 'be-' = make, cause, or thoroughly</a:t>
             </a:r>
             <a:endParaRPr lang="en-US" sz="800" dirty="0"/>
           </a:p>
@@ -27251,7 +28061,7 @@
                 <a:ea typeface="Trebuchet MS" pitchFamily="34" charset="-122"/>
                 <a:cs typeface="Trebuchet MS" pitchFamily="34" charset="-120"/>
               </a:rPr>
-              <a:t>become</a:t>
+              <a:t>beware</a:t>
             </a:r>
             <a:endParaRPr lang="en-US" sz="2800" dirty="0"/>
           </a:p>
@@ -27939,7 +28749,7 @@
                 <a:ea typeface="Calibri" pitchFamily="34" charset="-122"/>
                 <a:cs typeface="Calibri" pitchFamily="34" charset="-120"/>
               </a:rPr>
-              <a:t>Word Labs  •  wordlabs.app  •  Prefix: 'be-' = make, cause, around, thoroughly</a:t>
+              <a:t>Word Labs  •  wordlabs.app  •  Prefix: 'be-' = make, cause, or thoroughly</a:t>
             </a:r>
             <a:endParaRPr lang="en-US" sz="800" dirty="0"/>
           </a:p>
@@ -28078,7 +28888,7 @@
                 <a:ea typeface="Trebuchet MS" pitchFamily="34" charset="-122"/>
                 <a:cs typeface="Trebuchet MS" pitchFamily="34" charset="-120"/>
               </a:rPr>
-              <a:t>become</a:t>
+              <a:t>beware</a:t>
             </a:r>
             <a:endParaRPr lang="en-US" sz="2800" dirty="0"/>
           </a:p>
@@ -28256,7 +29066,7 @@
                 <a:ea typeface="Calibri" pitchFamily="34" charset="-122"/>
                 <a:cs typeface="Calibri" pitchFamily="34" charset="-120"/>
               </a:rPr>
-              <a:t>make, cause</a:t>
+              <a:t>make or cause</a:t>
             </a:r>
             <a:endParaRPr lang="en-US" sz="850" dirty="0"/>
           </a:p>
@@ -28329,7 +29139,7 @@
                 <a:ea typeface="Trebuchet MS" pitchFamily="34" charset="-122"/>
                 <a:cs typeface="Trebuchet MS" pitchFamily="34" charset="-120"/>
               </a:rPr>
-              <a:t>come</a:t>
+              <a:t>ware</a:t>
             </a:r>
             <a:endParaRPr lang="en-US" sz="1300" dirty="0"/>
           </a:p>
@@ -28368,7 +29178,7 @@
                 <a:ea typeface="Calibri" pitchFamily="34" charset="-122"/>
                 <a:cs typeface="Calibri" pitchFamily="34" charset="-120"/>
               </a:rPr>
-              <a:t>to arrive at a state</a:t>
+              <a:t>watchful or cautious</a:t>
             </a:r>
             <a:endParaRPr lang="en-US" sz="850" dirty="0"/>
           </a:p>
@@ -28924,7 +29734,7 @@
                 <a:ea typeface="Calibri" pitchFamily="34" charset="-122"/>
                 <a:cs typeface="Calibri" pitchFamily="34" charset="-120"/>
               </a:rPr>
-              <a:t>Word Labs  •  wordlabs.app  •  Prefix: 'be-' = make, cause, around, thoroughly</a:t>
+              <a:t>Word Labs  •  wordlabs.app  •  Prefix: 'be-' = make, cause, or thoroughly</a:t>
             </a:r>
             <a:endParaRPr lang="en-US" sz="800" dirty="0"/>
           </a:p>
@@ -29063,7 +29873,7 @@
                 <a:ea typeface="Trebuchet MS" pitchFamily="34" charset="-122"/>
                 <a:cs typeface="Trebuchet MS" pitchFamily="34" charset="-120"/>
               </a:rPr>
-              <a:t>become</a:t>
+              <a:t>beware</a:t>
             </a:r>
             <a:endParaRPr lang="en-US" sz="2800" dirty="0"/>
           </a:p>
@@ -29241,7 +30051,7 @@
                 <a:ea typeface="Calibri" pitchFamily="34" charset="-122"/>
                 <a:cs typeface="Calibri" pitchFamily="34" charset="-120"/>
               </a:rPr>
-              <a:t>make, cause</a:t>
+              <a:t>make or cause</a:t>
             </a:r>
             <a:endParaRPr lang="en-US" sz="850" dirty="0"/>
           </a:p>
@@ -29314,7 +30124,7 @@
                 <a:ea typeface="Trebuchet MS" pitchFamily="34" charset="-122"/>
                 <a:cs typeface="Trebuchet MS" pitchFamily="34" charset="-120"/>
               </a:rPr>
-              <a:t>come</a:t>
+              <a:t>ware</a:t>
             </a:r>
             <a:endParaRPr lang="en-US" sz="1300" dirty="0"/>
           </a:p>
@@ -29353,7 +30163,7 @@
                 <a:ea typeface="Calibri" pitchFamily="34" charset="-122"/>
                 <a:cs typeface="Calibri" pitchFamily="34" charset="-120"/>
               </a:rPr>
-              <a:t>to arrive at a state</a:t>
+              <a:t>watchful or cautious</a:t>
             </a:r>
             <a:endParaRPr lang="en-US" sz="850" dirty="0"/>
           </a:p>
@@ -29617,7 +30427,7 @@
                 <a:ea typeface="Trebuchet MS" pitchFamily="34" charset="-122"/>
                 <a:cs typeface="Trebuchet MS" pitchFamily="34" charset="-120"/>
               </a:rPr>
-              <a:t>come</a:t>
+              <a:t>ware</a:t>
             </a:r>
             <a:endParaRPr lang="en-US" sz="1400" dirty="0"/>
           </a:p>
@@ -30041,7 +30851,7 @@
                 <a:ea typeface="Calibri" pitchFamily="34" charset="-122"/>
                 <a:cs typeface="Calibri" pitchFamily="34" charset="-120"/>
               </a:rPr>
-              <a:t>Word Labs  •  wordlabs.app  •  Prefix: 'be-' = make, cause, around, thoroughly</a:t>
+              <a:t>Word Labs  •  wordlabs.app  •  Prefix: 'be-' = make, cause, or thoroughly</a:t>
             </a:r>
             <a:endParaRPr lang="en-US" sz="800" dirty="0"/>
           </a:p>
@@ -30180,7 +30990,7 @@
                 <a:ea typeface="Trebuchet MS" pitchFamily="34" charset="-122"/>
                 <a:cs typeface="Trebuchet MS" pitchFamily="34" charset="-120"/>
               </a:rPr>
-              <a:t>become</a:t>
+              <a:t>beware</a:t>
             </a:r>
             <a:endParaRPr lang="en-US" sz="2800" dirty="0"/>
           </a:p>
@@ -30358,7 +31168,7 @@
                 <a:ea typeface="Calibri" pitchFamily="34" charset="-122"/>
                 <a:cs typeface="Calibri" pitchFamily="34" charset="-120"/>
               </a:rPr>
-              <a:t>make, cause</a:t>
+              <a:t>make or cause</a:t>
             </a:r>
             <a:endParaRPr lang="en-US" sz="850" dirty="0"/>
           </a:p>
@@ -30431,7 +31241,7 @@
                 <a:ea typeface="Trebuchet MS" pitchFamily="34" charset="-122"/>
                 <a:cs typeface="Trebuchet MS" pitchFamily="34" charset="-120"/>
               </a:rPr>
-              <a:t>come</a:t>
+              <a:t>ware</a:t>
             </a:r>
             <a:endParaRPr lang="en-US" sz="1300" dirty="0"/>
           </a:p>
@@ -30470,7 +31280,7 @@
                 <a:ea typeface="Calibri" pitchFamily="34" charset="-122"/>
                 <a:cs typeface="Calibri" pitchFamily="34" charset="-120"/>
               </a:rPr>
-              <a:t>to arrive at a state</a:t>
+              <a:t>watchful or cautious</a:t>
             </a:r>
             <a:endParaRPr lang="en-US" sz="850" dirty="0"/>
           </a:p>
@@ -30734,7 +31544,7 @@
                 <a:ea typeface="Trebuchet MS" pitchFamily="34" charset="-122"/>
                 <a:cs typeface="Trebuchet MS" pitchFamily="34" charset="-120"/>
               </a:rPr>
-              <a:t>come</a:t>
+              <a:t>ware</a:t>
             </a:r>
             <a:endParaRPr lang="en-US" sz="1400" dirty="0"/>
           </a:p>
@@ -30841,7 +31651,7 @@
         </p:nvSpPr>
         <p:spPr>
           <a:xfrm>
-            <a:off x="2427732" y="4169664"/>
+            <a:off x="2670048" y="4169664"/>
             <a:ext cx="685800" cy="384048"/>
           </a:xfrm>
           <a:prstGeom prst="rect">
@@ -30868,7 +31678,7 @@
         </p:nvSpPr>
         <p:spPr>
           <a:xfrm>
-            <a:off x="2427732" y="4169664"/>
+            <a:off x="2670048" y="4169664"/>
             <a:ext cx="685800" cy="384048"/>
           </a:xfrm>
           <a:prstGeom prst="rect">
@@ -30907,7 +31717,7 @@
         </p:nvSpPr>
         <p:spPr>
           <a:xfrm>
-            <a:off x="3639312" y="4169664"/>
+            <a:off x="4123944" y="4169664"/>
             <a:ext cx="685800" cy="384048"/>
           </a:xfrm>
           <a:prstGeom prst="rect">
@@ -30934,7 +31744,7 @@
         </p:nvSpPr>
         <p:spPr>
           <a:xfrm>
-            <a:off x="3639312" y="4169664"/>
+            <a:off x="4123944" y="4169664"/>
             <a:ext cx="685800" cy="384048"/>
           </a:xfrm>
           <a:prstGeom prst="rect">
@@ -30973,7 +31783,7 @@
         </p:nvSpPr>
         <p:spPr>
           <a:xfrm>
-            <a:off x="4850892" y="4169664"/>
+            <a:off x="5577840" y="4169664"/>
             <a:ext cx="685800" cy="384048"/>
           </a:xfrm>
           <a:prstGeom prst="rect">
@@ -31000,7 +31810,7 @@
         </p:nvSpPr>
         <p:spPr>
           <a:xfrm>
-            <a:off x="4850892" y="4169664"/>
+            <a:off x="5577840" y="4169664"/>
             <a:ext cx="685800" cy="384048"/>
           </a:xfrm>
           <a:prstGeom prst="rect">
@@ -31025,7 +31835,7 @@
                 <a:ea typeface="Trebuchet MS" pitchFamily="34" charset="-122"/>
                 <a:cs typeface="Trebuchet MS" pitchFamily="34" charset="-120"/>
               </a:rPr>
-              <a:t>c</a:t>
+              <a:t>w</a:t>
             </a:r>
             <a:endParaRPr lang="en-US" sz="900" dirty="0"/>
           </a:p>
@@ -31039,7 +31849,7 @@
         </p:nvSpPr>
         <p:spPr>
           <a:xfrm>
-            <a:off x="6062472" y="4169664"/>
+            <a:off x="7031736" y="4169664"/>
             <a:ext cx="685800" cy="384048"/>
           </a:xfrm>
           <a:prstGeom prst="rect">
@@ -31066,7 +31876,7 @@
         </p:nvSpPr>
         <p:spPr>
           <a:xfrm>
-            <a:off x="6062472" y="4169664"/>
+            <a:off x="7031736" y="4169664"/>
             <a:ext cx="685800" cy="384048"/>
           </a:xfrm>
           <a:prstGeom prst="rect">
@@ -31091,7 +31901,7 @@
                 <a:ea typeface="Trebuchet MS" pitchFamily="34" charset="-122"/>
                 <a:cs typeface="Trebuchet MS" pitchFamily="34" charset="-120"/>
               </a:rPr>
-              <a:t>o</a:t>
+              <a:t>are</a:t>
             </a:r>
             <a:endParaRPr lang="en-US" sz="900" dirty="0"/>
           </a:p>
@@ -31099,79 +31909,13 @@
       </p:sp>
       <p:sp>
         <p:nvSpPr>
-          <p:cNvPr id="41" name="Shape 39"/>
-          <p:cNvSpPr/>
-          <p:nvPr/>
-        </p:nvSpPr>
-        <p:spPr>
-          <a:xfrm>
-            <a:off x="7274052" y="4169664"/>
-            <a:ext cx="685800" cy="384048"/>
-          </a:xfrm>
-          <a:prstGeom prst="rect">
-            <a:avLst>
-              <a:gd name="adj" fmla="val 9524"/>
-            </a:avLst>
-          </a:prstGeom>
-          <a:solidFill>
-            <a:srgbClr val="FFFFFF"/>
-          </a:solidFill>
-          <a:ln w="12700">
-            <a:solidFill>
-              <a:srgbClr val="DB2777"/>
-            </a:solidFill>
-            <a:prstDash val="solid"/>
-          </a:ln>
-        </p:spPr>
-      </p:sp>
-      <p:sp>
-        <p:nvSpPr>
-          <p:cNvPr id="42" name="Text 40"/>
-          <p:cNvSpPr/>
-          <p:nvPr/>
-        </p:nvSpPr>
-        <p:spPr>
-          <a:xfrm>
-            <a:off x="7274052" y="4169664"/>
-            <a:ext cx="685800" cy="384048"/>
-          </a:xfrm>
-          <a:prstGeom prst="rect">
-            <a:avLst/>
-          </a:prstGeom>
-          <a:noFill/>
-          <a:ln/>
-        </p:spPr>
-        <p:txBody>
-          <a:bodyPr wrap="square" lIns="0" tIns="0" rIns="0" bIns="0" rtlCol="0" anchor="ctr"/>
-          <a:lstStyle/>
-          <a:p>
-            <a:pPr algn="ctr" indent="0" marL="0">
-              <a:buNone/>
-            </a:pPr>
-            <a:r>
-              <a:rPr lang="en-US" sz="900" b="1" dirty="0">
-                <a:solidFill>
-                  <a:srgbClr val="9D174D"/>
-                </a:solidFill>
-                <a:latin typeface="Trebuchet MS" pitchFamily="34" charset="0"/>
-                <a:ea typeface="Trebuchet MS" pitchFamily="34" charset="-122"/>
-                <a:cs typeface="Trebuchet MS" pitchFamily="34" charset="-120"/>
-              </a:rPr>
-              <a:t>me</a:t>
-            </a:r>
-            <a:endParaRPr lang="en-US" sz="900" dirty="0"/>
-          </a:p>
-        </p:txBody>
-      </p:sp>
-      <p:sp>
-        <p:nvSpPr>
-          <p:cNvPr id="43" name="Text 41"/>
-          <p:cNvSpPr/>
-          <p:nvPr/>
-        </p:nvSpPr>
-        <p:spPr>
-          <a:xfrm>
-            <a:off x="7274052" y="4572000"/>
+          <p:cNvPr id="41" name="Text 39"/>
+          <p:cNvSpPr/>
+          <p:nvPr/>
+        </p:nvSpPr>
+        <p:spPr>
+          <a:xfrm>
+            <a:off x="7031736" y="4572000"/>
             <a:ext cx="685800" cy="219456"/>
           </a:xfrm>
           <a:prstGeom prst="rect">
@@ -31196,7 +31940,7 @@
                 <a:ea typeface="Calibri" pitchFamily="34" charset="-122"/>
                 <a:cs typeface="Calibri" pitchFamily="34" charset="-120"/>
               </a:rPr>
-              <a:t>/m/</a:t>
+              <a:t>/air/</a:t>
             </a:r>
             <a:endParaRPr lang="en-US" sz="750" dirty="0"/>
           </a:p>
@@ -31488,7 +32232,7 @@
                 <a:ea typeface="Calibri" pitchFamily="34" charset="-122"/>
                 <a:cs typeface="Calibri" pitchFamily="34" charset="-120"/>
               </a:rPr>
-              <a:t>Word Labs  •  wordlabs.app  •  Prefix: 'be-' = make, cause, around, thoroughly</a:t>
+              <a:t>Word Labs  •  wordlabs.app  •  Prefix: 'be-' = make, cause, or thoroughly</a:t>
             </a:r>
             <a:endParaRPr lang="en-US" sz="800" dirty="0"/>
           </a:p>
@@ -32657,7 +33401,7 @@
                 <a:ea typeface="Calibri" pitchFamily="34" charset="-122"/>
                 <a:cs typeface="Calibri" pitchFamily="34" charset="-120"/>
               </a:rPr>
-              <a:t>Word Labs  •  wordlabs.app  •  Prefix: 'be-' = make, cause, around, thoroughly</a:t>
+              <a:t>Word Labs  •  wordlabs.app  •  Prefix: 'be-' = make, cause, or thoroughly</a:t>
             </a:r>
             <a:endParaRPr lang="en-US" sz="800" dirty="0"/>
           </a:p>
@@ -33392,7 +34136,7 @@
                 <a:ea typeface="Trebuchet MS" pitchFamily="34" charset="-122"/>
                 <a:cs typeface="Trebuchet MS" pitchFamily="34" charset="-120"/>
               </a:rPr>
-              <a:t>-er</a:t>
+              <a:t>-ment</a:t>
             </a:r>
             <a:endParaRPr lang="en-US" sz="1300" dirty="0"/>
           </a:p>
@@ -33545,7 +34289,7 @@
                 <a:ea typeface="Trebuchet MS" pitchFamily="34" charset="-122"/>
                 <a:cs typeface="Trebuchet MS" pitchFamily="34" charset="-120"/>
               </a:rPr>
-              <a:t>-ment</a:t>
+              <a:t>-ful</a:t>
             </a:r>
             <a:endParaRPr lang="en-US" sz="1300" dirty="0"/>
           </a:p>
@@ -33634,7 +34378,7 @@
                 <a:ea typeface="Trebuchet MS" pitchFamily="34" charset="-122"/>
                 <a:cs typeface="Trebuchet MS" pitchFamily="34" charset="-120"/>
               </a:rPr>
-              <a:t>little</a:t>
+              <a:t>side</a:t>
             </a:r>
             <a:endParaRPr lang="en-US" sz="1300" dirty="0"/>
           </a:p>
@@ -33698,7 +34442,7 @@
                 <a:ea typeface="Trebuchet MS" pitchFamily="34" charset="-122"/>
                 <a:cs typeface="Trebuchet MS" pitchFamily="34" charset="-120"/>
               </a:rPr>
-              <a:t>-s</a:t>
+              <a:t>-er</a:t>
             </a:r>
             <a:endParaRPr lang="en-US" sz="1300" dirty="0"/>
           </a:p>
@@ -34067,7 +34811,7 @@
                 <a:ea typeface="Trebuchet MS" pitchFamily="34" charset="-122"/>
                 <a:cs typeface="Trebuchet MS" pitchFamily="34" charset="-120"/>
               </a:rPr>
-              <a:t>believe</a:t>
+              <a:t>beneath</a:t>
             </a:r>
             <a:endParaRPr lang="en-US" sz="1200" dirty="0"/>
           </a:p>
@@ -34133,7 +34877,7 @@
                 <a:ea typeface="Trebuchet MS" pitchFamily="34" charset="-122"/>
                 <a:cs typeface="Trebuchet MS" pitchFamily="34" charset="-120"/>
               </a:rPr>
-              <a:t>beneath</a:t>
+              <a:t>beloved</a:t>
             </a:r>
             <a:endParaRPr lang="en-US" sz="1200" dirty="0"/>
           </a:p>
@@ -34265,7 +35009,7 @@
                 <a:ea typeface="Trebuchet MS" pitchFamily="34" charset="-122"/>
                 <a:cs typeface="Trebuchet MS" pitchFamily="34" charset="-120"/>
               </a:rPr>
-              <a:t>beloved</a:t>
+              <a:t>bewildered</a:t>
             </a:r>
             <a:endParaRPr lang="en-US" sz="1200" dirty="0"/>
           </a:p>
@@ -34557,7 +35301,7 @@
                 <a:ea typeface="Calibri" pitchFamily="34" charset="-122"/>
                 <a:cs typeface="Calibri" pitchFamily="34" charset="-120"/>
               </a:rPr>
-              <a:t>Word Labs  •  wordlabs.app  •  Prefix: 'be-' = make, cause, around, thoroughly</a:t>
+              <a:t>Word Labs  •  wordlabs.app  •  Prefix: 'be-' = make, cause, or thoroughly</a:t>
             </a:r>
             <a:endParaRPr lang="en-US" sz="800" dirty="0"/>
           </a:p>
@@ -34721,7 +35465,7 @@
                 <a:ea typeface="Calibri" pitchFamily="34" charset="-122"/>
                 <a:cs typeface="Calibri" pitchFamily="34" charset="-120"/>
               </a:rPr>
-              <a:t>A meaningful word part added to the beginning of a root to change its meaning. The prefix 'be-' means 'make, cause, around, thoroughly'.</a:t>
+              <a:t>A meaningful word part added to the beginning of a root to change its meaning. The prefix 'be-' means 'make, cause, or thoroughly'.</a:t>
             </a:r>
             <a:endParaRPr lang="en-US" sz="1350" dirty="0"/>
           </a:p>
@@ -35341,7 +36085,7 @@
                 <a:ea typeface="Calibri" pitchFamily="34" charset="-122"/>
                 <a:cs typeface="Calibri" pitchFamily="34" charset="-120"/>
               </a:rPr>
-              <a:t>Word Labs  •  wordlabs.app  •  Prefix: 'be-' = make, cause, around, thoroughly</a:t>
+              <a:t>Word Labs  •  wordlabs.app  •  Prefix: 'be-' = make, cause, or thoroughly</a:t>
             </a:r>
             <a:endParaRPr lang="en-US" sz="800" dirty="0"/>
           </a:p>
@@ -35453,7 +36197,7 @@
                 <a:ea typeface="Calibri" pitchFamily="34" charset="-122"/>
                 <a:cs typeface="Calibri" pitchFamily="34" charset="-120"/>
               </a:rPr>
-              <a:t>1.  The prefix 'be-' comes from Old English.</a:t>
+              <a:t>1.  The prefix 'be-' can turn a noun like 'friend' into a verb, as in 'befriend'.</a:t>
             </a:r>
             <a:endParaRPr lang="en-US" sz="1300" dirty="0"/>
           </a:p>
@@ -35592,7 +36336,7 @@
                 <a:ea typeface="Calibri" pitchFamily="34" charset="-122"/>
                 <a:cs typeface="Calibri" pitchFamily="34" charset="-120"/>
               </a:rPr>
-              <a:t>2.  The prefix 'be-' always means 'again' or 'back'.</a:t>
+              <a:t>2.  'Belong' and 'become' both start with the prefix 'be-'.</a:t>
             </a:r>
             <a:endParaRPr lang="en-US" sz="1300" dirty="0"/>
           </a:p>
@@ -35615,11 +36359,11 @@
             </a:avLst>
           </a:prstGeom>
           <a:solidFill>
-            <a:srgbClr val="FEE2E2"/>
-          </a:solidFill>
-          <a:ln w="12700">
-            <a:solidFill>
-              <a:srgbClr val="DC2626"/>
+            <a:srgbClr val="DCFCE7"/>
+          </a:solidFill>
+          <a:ln w="12700">
+            <a:solidFill>
+              <a:srgbClr val="16A34A"/>
             </a:solidFill>
             <a:prstDash val="solid"/>
           </a:ln>
@@ -35652,13 +36396,13 @@
             <a:r>
               <a:rPr lang="en-US" sz="1100" b="1" dirty="0">
                 <a:solidFill>
-                  <a:srgbClr val="DC2626"/>
+                  <a:srgbClr val="16A34A"/>
                 </a:solidFill>
                 <a:latin typeface="Trebuchet MS" pitchFamily="34" charset="0"/>
                 <a:ea typeface="Trebuchet MS" pitchFamily="34" charset="-122"/>
                 <a:cs typeface="Trebuchet MS" pitchFamily="34" charset="-120"/>
               </a:rPr>
-              <a:t>FALSE</a:t>
+              <a:t>TRUE</a:t>
             </a:r>
             <a:endParaRPr lang="en-US" sz="1100" dirty="0"/>
           </a:p>
@@ -35731,7 +36475,7 @@
                 <a:ea typeface="Calibri" pitchFamily="34" charset="-122"/>
                 <a:cs typeface="Calibri" pitchFamily="34" charset="-120"/>
               </a:rPr>
-              <a:t>3.  The word 'befriend' uses the prefix 'be-' to mean making someone a friend.</a:t>
+              <a:t>3.  The prefix 'be-' always means 'again' or 'back'.</a:t>
             </a:r>
             <a:endParaRPr lang="en-US" sz="1300" dirty="0"/>
           </a:p>
@@ -35754,11 +36498,11 @@
             </a:avLst>
           </a:prstGeom>
           <a:solidFill>
-            <a:srgbClr val="DCFCE7"/>
-          </a:solidFill>
-          <a:ln w="12700">
-            <a:solidFill>
-              <a:srgbClr val="16A34A"/>
+            <a:srgbClr val="FEE2E2"/>
+          </a:solidFill>
+          <a:ln w="12700">
+            <a:solidFill>
+              <a:srgbClr val="DC2626"/>
             </a:solidFill>
             <a:prstDash val="solid"/>
           </a:ln>
@@ -35791,13 +36535,13 @@
             <a:r>
               <a:rPr lang="en-US" sz="1100" b="1" dirty="0">
                 <a:solidFill>
-                  <a:srgbClr val="16A34A"/>
+                  <a:srgbClr val="DC2626"/>
                 </a:solidFill>
                 <a:latin typeface="Trebuchet MS" pitchFamily="34" charset="0"/>
                 <a:ea typeface="Trebuchet MS" pitchFamily="34" charset="-122"/>
                 <a:cs typeface="Trebuchet MS" pitchFamily="34" charset="-120"/>
               </a:rPr>
-              <a:t>TRUE</a:t>
+              <a:t>FALSE</a:t>
             </a:r>
             <a:endParaRPr lang="en-US" sz="1100" dirty="0"/>
           </a:p>
@@ -35870,7 +36614,7 @@
                 <a:ea typeface="Calibri" pitchFamily="34" charset="-122"/>
                 <a:cs typeface="Calibri" pitchFamily="34" charset="-120"/>
               </a:rPr>
-              <a:t>4.  Adding 'be-' to a base word can make it mean to thoroughly do something.</a:t>
+              <a:t>4.  The prefix 'be-' changes its spelling depending on the first letter of the base word.</a:t>
             </a:r>
             <a:endParaRPr lang="en-US" sz="1300" dirty="0"/>
           </a:p>
@@ -35893,11 +36637,11 @@
             </a:avLst>
           </a:prstGeom>
           <a:solidFill>
-            <a:srgbClr val="DCFCE7"/>
-          </a:solidFill>
-          <a:ln w="12700">
-            <a:solidFill>
-              <a:srgbClr val="16A34A"/>
+            <a:srgbClr val="FEE2E2"/>
+          </a:solidFill>
+          <a:ln w="12700">
+            <a:solidFill>
+              <a:srgbClr val="DC2626"/>
             </a:solidFill>
             <a:prstDash val="solid"/>
           </a:ln>
@@ -35930,13 +36674,13 @@
             <a:r>
               <a:rPr lang="en-US" sz="1100" b="1" dirty="0">
                 <a:solidFill>
-                  <a:srgbClr val="16A34A"/>
+                  <a:srgbClr val="DC2626"/>
                 </a:solidFill>
                 <a:latin typeface="Trebuchet MS" pitchFamily="34" charset="0"/>
                 <a:ea typeface="Trebuchet MS" pitchFamily="34" charset="-122"/>
                 <a:cs typeface="Trebuchet MS" pitchFamily="34" charset="-120"/>
               </a:rPr>
-              <a:t>TRUE</a:t>
+              <a:t>FALSE</a:t>
             </a:r>
             <a:endParaRPr lang="en-US" sz="1100" dirty="0"/>
           </a:p>
@@ -36009,7 +36753,7 @@
                 <a:ea typeface="Calibri" pitchFamily="34" charset="-122"/>
                 <a:cs typeface="Calibri" pitchFamily="34" charset="-120"/>
               </a:rPr>
-              <a:t>5.  The prefix 'be-' is the same as the prefix 're-'.</a:t>
+              <a:t>5.  The prefix 'be-' comes from Old English.</a:t>
             </a:r>
             <a:endParaRPr lang="en-US" sz="1300" dirty="0"/>
           </a:p>
@@ -36032,11 +36776,11 @@
             </a:avLst>
           </a:prstGeom>
           <a:solidFill>
-            <a:srgbClr val="FEE2E2"/>
-          </a:solidFill>
-          <a:ln w="12700">
-            <a:solidFill>
-              <a:srgbClr val="DC2626"/>
+            <a:srgbClr val="DCFCE7"/>
+          </a:solidFill>
+          <a:ln w="12700">
+            <a:solidFill>
+              <a:srgbClr val="16A34A"/>
             </a:solidFill>
             <a:prstDash val="solid"/>
           </a:ln>
@@ -36069,13 +36813,13 @@
             <a:r>
               <a:rPr lang="en-US" sz="1100" b="1" dirty="0">
                 <a:solidFill>
-                  <a:srgbClr val="DC2626"/>
+                  <a:srgbClr val="16A34A"/>
                 </a:solidFill>
                 <a:latin typeface="Trebuchet MS" pitchFamily="34" charset="0"/>
                 <a:ea typeface="Trebuchet MS" pitchFamily="34" charset="-122"/>
                 <a:cs typeface="Trebuchet MS" pitchFamily="34" charset="-120"/>
               </a:rPr>
-              <a:t>FALSE</a:t>
+              <a:t>TRUE</a:t>
             </a:r>
             <a:endParaRPr lang="en-US" sz="1100" dirty="0"/>
           </a:p>
@@ -36367,7 +37111,7 @@
                 <a:ea typeface="Calibri" pitchFamily="34" charset="-122"/>
                 <a:cs typeface="Calibri" pitchFamily="34" charset="-120"/>
               </a:rPr>
-              <a:t>Word Labs  •  wordlabs.app  •  Prefix: 'be-' = make, cause, around, thoroughly</a:t>
+              <a:t>Word Labs  •  wordlabs.app  •  Prefix: 'be-' = make, cause, or thoroughly</a:t>
             </a:r>
             <a:endParaRPr lang="en-US" sz="800" dirty="0"/>
           </a:p>
@@ -36504,7 +37248,7 @@
                 <a:ea typeface="Trebuchet MS" pitchFamily="34" charset="-122"/>
                 <a:cs typeface="Trebuchet MS" pitchFamily="34" charset="-120"/>
               </a:rPr>
-              <a:t>make, cause, around, thoroughly</a:t>
+              <a:t>make, cause, or thoroughly</a:t>
             </a:r>
             <a:endParaRPr lang="en-US" sz="2000" dirty="0"/>
           </a:p>
@@ -36912,7 +37656,7 @@
                 <a:ea typeface="Trebuchet MS" pitchFamily="34" charset="-122"/>
                 <a:cs typeface="Trebuchet MS" pitchFamily="34" charset="-120"/>
               </a:rPr>
-              <a:t>believe</a:t>
+              <a:t>beneath</a:t>
             </a:r>
             <a:endParaRPr lang="en-US" sz="1300" dirty="0"/>
           </a:p>
@@ -36978,7 +37722,7 @@
                 <a:ea typeface="Trebuchet MS" pitchFamily="34" charset="-122"/>
                 <a:cs typeface="Trebuchet MS" pitchFamily="34" charset="-120"/>
               </a:rPr>
-              <a:t>beneath</a:t>
+              <a:t>beloved</a:t>
             </a:r>
             <a:endParaRPr lang="en-US" sz="1300" dirty="0"/>
           </a:p>
@@ -37336,7 +38080,7 @@
                 <a:ea typeface="Calibri" pitchFamily="34" charset="-122"/>
                 <a:cs typeface="Calibri" pitchFamily="34" charset="-120"/>
               </a:rPr>
-              <a:t>Word Labs  •  wordlabs.app  •  Prefix: 'be-' = make, cause, around, thoroughly</a:t>
+              <a:t>Word Labs  •  wordlabs.app  •  Prefix: 'be-' = make, cause, or thoroughly</a:t>
             </a:r>
             <a:endParaRPr lang="en-US" sz="800" dirty="0"/>
           </a:p>
@@ -38071,7 +38815,7 @@
                 <a:ea typeface="Trebuchet MS" pitchFamily="34" charset="-122"/>
                 <a:cs typeface="Trebuchet MS" pitchFamily="34" charset="-120"/>
               </a:rPr>
-              <a:t>-er</a:t>
+              <a:t>-ment</a:t>
             </a:r>
             <a:endParaRPr lang="en-US" sz="1300" dirty="0"/>
           </a:p>
@@ -38224,7 +38968,7 @@
                 <a:ea typeface="Trebuchet MS" pitchFamily="34" charset="-122"/>
                 <a:cs typeface="Trebuchet MS" pitchFamily="34" charset="-120"/>
               </a:rPr>
-              <a:t>-ment</a:t>
+              <a:t>-ful</a:t>
             </a:r>
             <a:endParaRPr lang="en-US" sz="1300" dirty="0"/>
           </a:p>
@@ -38313,7 +39057,7 @@
                 <a:ea typeface="Trebuchet MS" pitchFamily="34" charset="-122"/>
                 <a:cs typeface="Trebuchet MS" pitchFamily="34" charset="-120"/>
               </a:rPr>
-              <a:t>little</a:t>
+              <a:t>side</a:t>
             </a:r>
             <a:endParaRPr lang="en-US" sz="1300" dirty="0"/>
           </a:p>
@@ -38377,7 +39121,7 @@
                 <a:ea typeface="Trebuchet MS" pitchFamily="34" charset="-122"/>
                 <a:cs typeface="Trebuchet MS" pitchFamily="34" charset="-120"/>
               </a:rPr>
-              <a:t>-s</a:t>
+              <a:t>-er</a:t>
             </a:r>
             <a:endParaRPr lang="en-US" sz="1300" dirty="0"/>
           </a:p>
@@ -39110,7 +39854,7 @@
                 <a:ea typeface="Calibri" pitchFamily="34" charset="-122"/>
                 <a:cs typeface="Calibri" pitchFamily="34" charset="-120"/>
               </a:rPr>
-              <a:t>Word Labs  •  wordlabs.app  •  Prefix: 'be-' = make, cause, around, thoroughly</a:t>
+              <a:t>Word Labs  •  wordlabs.app  •  Prefix: 'be-' = make, cause, or thoroughly</a:t>
             </a:r>
             <a:endParaRPr lang="en-US" sz="800" dirty="0"/>
           </a:p>
@@ -39288,7 +40032,7 @@
                 <a:ea typeface="Calibri" pitchFamily="34" charset="-122"/>
                 <a:cs typeface="Calibri" pitchFamily="34" charset="-120"/>
               </a:rPr>
-              <a:t>To become a friend to someone; to act in a kind and friendly way towards them.</a:t>
+              <a:t>To become a friend to someone; to treat someone in a kind and friendly way.</a:t>
             </a:r>
             <a:endParaRPr lang="en-US" sz="1200" dirty="0"/>
           </a:p>
@@ -39427,7 +40171,7 @@
                 <a:ea typeface="Calibri" pitchFamily="34" charset="-122"/>
                 <a:cs typeface="Calibri" pitchFamily="34" charset="-120"/>
               </a:rPr>
-              <a:t>To start to be something different; to grow into or change into something.</a:t>
+              <a:t>To start to be something; to grow or change into something.</a:t>
             </a:r>
             <a:endParaRPr lang="en-US" sz="1200" dirty="0"/>
           </a:p>
@@ -39566,7 +40310,7 @@
                 <a:ea typeface="Calibri" pitchFamily="34" charset="-122"/>
                 <a:cs typeface="Calibri" pitchFamily="34" charset="-120"/>
               </a:rPr>
-              <a:t>To think that something is true or real, even if you cannot see it.</a:t>
+              <a:t>Under or below something.</a:t>
             </a:r>
             <a:endParaRPr lang="en-US" sz="1200" dirty="0"/>
           </a:p>
@@ -39705,7 +40449,7 @@
                 <a:ea typeface="Calibri" pitchFamily="34" charset="-122"/>
                 <a:cs typeface="Calibri" pitchFamily="34" charset="-120"/>
               </a:rPr>
-              <a:t>Under something; in a lower position than something else.</a:t>
+              <a:t>Deeply loved and cared for by others.</a:t>
             </a:r>
             <a:endParaRPr lang="en-US" sz="1200" dirty="0"/>
           </a:p>
@@ -39778,7 +40522,7 @@
                 <a:ea typeface="Trebuchet MS" pitchFamily="34" charset="-122"/>
                 <a:cs typeface="Trebuchet MS" pitchFamily="34" charset="-120"/>
               </a:rPr>
-              <a:t>believe</a:t>
+              <a:t>beneath</a:t>
             </a:r>
             <a:endParaRPr lang="en-US" sz="1200" dirty="0"/>
           </a:p>
@@ -39844,7 +40588,7 @@
                 <a:ea typeface="Calibri" pitchFamily="34" charset="-122"/>
                 <a:cs typeface="Calibri" pitchFamily="34" charset="-120"/>
               </a:rPr>
-              <a:t>To act in a particular way, especially in a polite or good way.</a:t>
+              <a:t>To act in a certain way, especially in a good or proper manner.</a:t>
             </a:r>
             <a:endParaRPr lang="en-US" sz="1200" dirty="0"/>
           </a:p>
@@ -39917,7 +40661,7 @@
                 <a:ea typeface="Trebuchet MS" pitchFamily="34" charset="-122"/>
                 <a:cs typeface="Trebuchet MS" pitchFamily="34" charset="-120"/>
               </a:rPr>
-              <a:t>beneath</a:t>
+              <a:t>beloved</a:t>
             </a:r>
             <a:endParaRPr lang="en-US" sz="1200" dirty="0"/>
           </a:p>
@@ -39983,7 +40727,7 @@
                 <a:ea typeface="Calibri" pitchFamily="34" charset="-122"/>
                 <a:cs typeface="Calibri" pitchFamily="34" charset="-120"/>
               </a:rPr>
-              <a:t>To be careful and watch out for something dangerous.</a:t>
+              <a:t>To be careful and watch out for danger or something harmful.</a:t>
             </a:r>
             <a:endParaRPr lang="en-US" sz="1200" dirty="0"/>
           </a:p>
@@ -40414,7 +41158,7 @@
                 <a:ea typeface="Calibri" pitchFamily="34" charset="-122"/>
                 <a:cs typeface="Calibri" pitchFamily="34" charset="-120"/>
               </a:rPr>
-              <a:t>Word Labs  •  wordlabs.app  •  Prefix: 'be-' = make, cause, around, thoroughly</a:t>
+              <a:t>Word Labs  •  wordlabs.app  •  Prefix: 'be-' = make, cause, or thoroughly</a:t>
             </a:r>
             <a:endParaRPr lang="en-US" sz="800" dirty="0"/>
           </a:p>
@@ -40617,7 +41361,7 @@
                 <a:ea typeface="Calibri" pitchFamily="34" charset="-122"/>
                 <a:cs typeface="Calibri" pitchFamily="34" charset="-120"/>
               </a:rPr>
-              <a:t>She decided to befriend the new student who had just moved to their school.</a:t>
+              <a:t>It is important to behave respectfully when you are visiting someone else's home.</a:t>
             </a:r>
             <a:endParaRPr lang="en-US" sz="1500" dirty="0"/>
           </a:p>
@@ -40781,7 +41525,7 @@
                 <a:ea typeface="Calibri" pitchFamily="34" charset="-122"/>
                 <a:cs typeface="Calibri" pitchFamily="34" charset="-120"/>
               </a:rPr>
-              <a:t>The children were told to behave quietly while they waited in the library.</a:t>
+              <a:t>Mia decided to befriend the new student who had just moved to town.</a:t>
             </a:r>
             <a:endParaRPr lang="en-US" sz="1500" dirty="0"/>
           </a:p>
@@ -40945,7 +41689,7 @@
                 <a:ea typeface="Calibri" pitchFamily="34" charset="-122"/>
                 <a:cs typeface="Calibri" pitchFamily="34" charset="-120"/>
               </a:rPr>
-              <a:t>He was careful to beware of the slippery rocks near the edge of the creek.</a:t>
+              <a:t>The children were warned to beware of the slippery rocks near the creek.</a:t>
             </a:r>
             <a:endParaRPr lang="en-US" sz="1500" dirty="0"/>
           </a:p>
